--- a/我心切切渴慕你(崇拜版).pptx
+++ b/我心切切渴慕你(崇拜版).pptx
@@ -5,10 +5,14 @@
     <p:sldMasterId id="2147483660" r:id="rId1"/>
   </p:sldMasterIdLst>
   <p:sldIdLst>
-    <p:sldId id="256" r:id="rId2"/>
-    <p:sldId id="257" r:id="rId3"/>
-    <p:sldId id="258" r:id="rId4"/>
-    <p:sldId id="259" r:id="rId5"/>
+    <p:sldId id="1664" r:id="rId2"/>
+    <p:sldId id="1665" r:id="rId3"/>
+    <p:sldId id="1666" r:id="rId4"/>
+    <p:sldId id="1667" r:id="rId5"/>
+    <p:sldId id="1668" r:id="rId6"/>
+    <p:sldId id="1669" r:id="rId7"/>
+    <p:sldId id="1670" r:id="rId8"/>
+    <p:sldId id="1671" r:id="rId9"/>
   </p:sldIdLst>
   <p:sldSz cx="9144000" cy="5143500" type="screen16x9"/>
   <p:notesSz cx="6858000" cy="9144000"/>
@@ -164,10 +168,9 @@
           <a:lstStyle/>
           <a:p>
             <a:r>
-              <a:rPr lang="zh-TW" altLang="en-US" smtClean="0"/>
+              <a:rPr lang="zh-TW" altLang="en-US"/>
               <a:t>按一下以編輯母片標題樣式</a:t>
             </a:r>
-            <a:endParaRPr lang="zh-TW" altLang="en-US"/>
           </a:p>
         </p:txBody>
       </p:sp>
@@ -283,10 +286,9 @@
           </a:lstStyle>
           <a:p>
             <a:r>
-              <a:rPr lang="zh-TW" altLang="en-US" smtClean="0"/>
+              <a:rPr lang="zh-TW" altLang="en-US"/>
               <a:t>按一下以編輯母片副標題樣式</a:t>
             </a:r>
-            <a:endParaRPr lang="zh-TW" altLang="en-US"/>
           </a:p>
         </p:txBody>
       </p:sp>
@@ -308,7 +310,7 @@
             <a:fld id="{1358C6C7-DC36-49BA-B09E-2C760A046223}" type="datetimeFigureOut">
               <a:rPr lang="zh-TW" altLang="en-US" smtClean="0"/>
               <a:pPr/>
-              <a:t>2020/1/18</a:t>
+              <a:t>2024/11/2</a:t>
             </a:fld>
             <a:endParaRPr lang="zh-TW" altLang="en-US"/>
           </a:p>
@@ -398,10 +400,9 @@
           <a:lstStyle/>
           <a:p>
             <a:r>
-              <a:rPr lang="zh-TW" altLang="en-US" smtClean="0"/>
+              <a:rPr lang="zh-TW" altLang="en-US"/>
               <a:t>按一下以編輯母片標題樣式</a:t>
             </a:r>
-            <a:endParaRPr lang="zh-TW" altLang="en-US"/>
           </a:p>
         </p:txBody>
       </p:sp>
@@ -422,38 +423,37 @@
           <a:p>
             <a:pPr lvl="0"/>
             <a:r>
-              <a:rPr lang="zh-TW" altLang="en-US" smtClean="0"/>
+              <a:rPr lang="zh-TW" altLang="en-US"/>
               <a:t>按一下以編輯母片文字樣式</a:t>
             </a:r>
           </a:p>
           <a:p>
             <a:pPr lvl="1"/>
             <a:r>
-              <a:rPr lang="zh-TW" altLang="en-US" smtClean="0"/>
+              <a:rPr lang="zh-TW" altLang="en-US"/>
               <a:t>第二層</a:t>
             </a:r>
           </a:p>
           <a:p>
             <a:pPr lvl="2"/>
             <a:r>
-              <a:rPr lang="zh-TW" altLang="en-US" smtClean="0"/>
+              <a:rPr lang="zh-TW" altLang="en-US"/>
               <a:t>第三層</a:t>
             </a:r>
           </a:p>
           <a:p>
             <a:pPr lvl="3"/>
             <a:r>
-              <a:rPr lang="zh-TW" altLang="en-US" smtClean="0"/>
+              <a:rPr lang="zh-TW" altLang="en-US"/>
               <a:t>第四層</a:t>
             </a:r>
           </a:p>
           <a:p>
             <a:pPr lvl="4"/>
             <a:r>
-              <a:rPr lang="zh-TW" altLang="en-US" smtClean="0"/>
+              <a:rPr lang="zh-TW" altLang="en-US"/>
               <a:t>第五層</a:t>
             </a:r>
-            <a:endParaRPr lang="zh-TW" altLang="en-US"/>
           </a:p>
         </p:txBody>
       </p:sp>
@@ -475,7 +475,7 @@
             <a:fld id="{1358C6C7-DC36-49BA-B09E-2C760A046223}" type="datetimeFigureOut">
               <a:rPr lang="zh-TW" altLang="en-US" smtClean="0"/>
               <a:pPr/>
-              <a:t>2020/1/18</a:t>
+              <a:t>2024/11/2</a:t>
             </a:fld>
             <a:endParaRPr lang="zh-TW" altLang="en-US"/>
           </a:p>
@@ -570,10 +570,9 @@
           <a:lstStyle/>
           <a:p>
             <a:r>
-              <a:rPr lang="zh-TW" altLang="en-US" smtClean="0"/>
+              <a:rPr lang="zh-TW" altLang="en-US"/>
               <a:t>按一下以編輯母片標題樣式</a:t>
             </a:r>
-            <a:endParaRPr lang="zh-TW" altLang="en-US"/>
           </a:p>
         </p:txBody>
       </p:sp>
@@ -599,38 +598,37 @@
           <a:p>
             <a:pPr lvl="0"/>
             <a:r>
-              <a:rPr lang="zh-TW" altLang="en-US" smtClean="0"/>
+              <a:rPr lang="zh-TW" altLang="en-US"/>
               <a:t>按一下以編輯母片文字樣式</a:t>
             </a:r>
           </a:p>
           <a:p>
             <a:pPr lvl="1"/>
             <a:r>
-              <a:rPr lang="zh-TW" altLang="en-US" smtClean="0"/>
+              <a:rPr lang="zh-TW" altLang="en-US"/>
               <a:t>第二層</a:t>
             </a:r>
           </a:p>
           <a:p>
             <a:pPr lvl="2"/>
             <a:r>
-              <a:rPr lang="zh-TW" altLang="en-US" smtClean="0"/>
+              <a:rPr lang="zh-TW" altLang="en-US"/>
               <a:t>第三層</a:t>
             </a:r>
           </a:p>
           <a:p>
             <a:pPr lvl="3"/>
             <a:r>
-              <a:rPr lang="zh-TW" altLang="en-US" smtClean="0"/>
+              <a:rPr lang="zh-TW" altLang="en-US"/>
               <a:t>第四層</a:t>
             </a:r>
           </a:p>
           <a:p>
             <a:pPr lvl="4"/>
             <a:r>
-              <a:rPr lang="zh-TW" altLang="en-US" smtClean="0"/>
+              <a:rPr lang="zh-TW" altLang="en-US"/>
               <a:t>第五層</a:t>
             </a:r>
-            <a:endParaRPr lang="zh-TW" altLang="en-US"/>
           </a:p>
         </p:txBody>
       </p:sp>
@@ -652,7 +650,7 @@
             <a:fld id="{1358C6C7-DC36-49BA-B09E-2C760A046223}" type="datetimeFigureOut">
               <a:rPr lang="zh-TW" altLang="en-US" smtClean="0"/>
               <a:pPr/>
-              <a:t>2020/1/18</a:t>
+              <a:t>2024/11/2</a:t>
             </a:fld>
             <a:endParaRPr lang="zh-TW" altLang="en-US"/>
           </a:p>
@@ -742,10 +740,9 @@
           <a:lstStyle/>
           <a:p>
             <a:r>
-              <a:rPr lang="zh-TW" altLang="en-US" smtClean="0"/>
+              <a:rPr lang="zh-TW" altLang="en-US"/>
               <a:t>按一下以編輯母片標題樣式</a:t>
             </a:r>
-            <a:endParaRPr lang="zh-TW" altLang="en-US"/>
           </a:p>
         </p:txBody>
       </p:sp>
@@ -766,38 +763,37 @@
           <a:p>
             <a:pPr lvl="0"/>
             <a:r>
-              <a:rPr lang="zh-TW" altLang="en-US" smtClean="0"/>
+              <a:rPr lang="zh-TW" altLang="en-US"/>
               <a:t>按一下以編輯母片文字樣式</a:t>
             </a:r>
           </a:p>
           <a:p>
             <a:pPr lvl="1"/>
             <a:r>
-              <a:rPr lang="zh-TW" altLang="en-US" smtClean="0"/>
+              <a:rPr lang="zh-TW" altLang="en-US"/>
               <a:t>第二層</a:t>
             </a:r>
           </a:p>
           <a:p>
             <a:pPr lvl="2"/>
             <a:r>
-              <a:rPr lang="zh-TW" altLang="en-US" smtClean="0"/>
+              <a:rPr lang="zh-TW" altLang="en-US"/>
               <a:t>第三層</a:t>
             </a:r>
           </a:p>
           <a:p>
             <a:pPr lvl="3"/>
             <a:r>
-              <a:rPr lang="zh-TW" altLang="en-US" smtClean="0"/>
+              <a:rPr lang="zh-TW" altLang="en-US"/>
               <a:t>第四層</a:t>
             </a:r>
           </a:p>
           <a:p>
             <a:pPr lvl="4"/>
             <a:r>
-              <a:rPr lang="zh-TW" altLang="en-US" smtClean="0"/>
+              <a:rPr lang="zh-TW" altLang="en-US"/>
               <a:t>第五層</a:t>
             </a:r>
-            <a:endParaRPr lang="zh-TW" altLang="en-US"/>
           </a:p>
         </p:txBody>
       </p:sp>
@@ -819,7 +815,7 @@
             <a:fld id="{1358C6C7-DC36-49BA-B09E-2C760A046223}" type="datetimeFigureOut">
               <a:rPr lang="zh-TW" altLang="en-US" smtClean="0"/>
               <a:pPr/>
-              <a:t>2020/1/18</a:t>
+              <a:t>2024/11/2</a:t>
             </a:fld>
             <a:endParaRPr lang="zh-TW" altLang="en-US"/>
           </a:p>
@@ -918,10 +914,9 @@
           </a:lstStyle>
           <a:p>
             <a:r>
-              <a:rPr lang="zh-TW" altLang="en-US" smtClean="0"/>
+              <a:rPr lang="zh-TW" altLang="en-US"/>
               <a:t>按一下以編輯母片標題樣式</a:t>
             </a:r>
-            <a:endParaRPr lang="zh-TW" altLang="en-US"/>
           </a:p>
         </p:txBody>
       </p:sp>
@@ -1038,7 +1033,7 @@
           <a:p>
             <a:pPr lvl="0"/>
             <a:r>
-              <a:rPr lang="zh-TW" altLang="en-US" smtClean="0"/>
+              <a:rPr lang="zh-TW" altLang="en-US"/>
               <a:t>按一下以編輯母片文字樣式</a:t>
             </a:r>
           </a:p>
@@ -1062,7 +1057,7 @@
             <a:fld id="{1358C6C7-DC36-49BA-B09E-2C760A046223}" type="datetimeFigureOut">
               <a:rPr lang="zh-TW" altLang="en-US" smtClean="0"/>
               <a:pPr/>
-              <a:t>2020/1/18</a:t>
+              <a:t>2024/11/2</a:t>
             </a:fld>
             <a:endParaRPr lang="zh-TW" altLang="en-US"/>
           </a:p>
@@ -1152,10 +1147,9 @@
           <a:lstStyle/>
           <a:p>
             <a:r>
-              <a:rPr lang="zh-TW" altLang="en-US" smtClean="0"/>
+              <a:rPr lang="zh-TW" altLang="en-US"/>
               <a:t>按一下以編輯母片標題樣式</a:t>
             </a:r>
-            <a:endParaRPr lang="zh-TW" altLang="en-US"/>
           </a:p>
         </p:txBody>
       </p:sp>
@@ -1209,38 +1203,37 @@
           <a:p>
             <a:pPr lvl="0"/>
             <a:r>
-              <a:rPr lang="zh-TW" altLang="en-US" smtClean="0"/>
+              <a:rPr lang="zh-TW" altLang="en-US"/>
               <a:t>按一下以編輯母片文字樣式</a:t>
             </a:r>
           </a:p>
           <a:p>
             <a:pPr lvl="1"/>
             <a:r>
-              <a:rPr lang="zh-TW" altLang="en-US" smtClean="0"/>
+              <a:rPr lang="zh-TW" altLang="en-US"/>
               <a:t>第二層</a:t>
             </a:r>
           </a:p>
           <a:p>
             <a:pPr lvl="2"/>
             <a:r>
-              <a:rPr lang="zh-TW" altLang="en-US" smtClean="0"/>
+              <a:rPr lang="zh-TW" altLang="en-US"/>
               <a:t>第三層</a:t>
             </a:r>
           </a:p>
           <a:p>
             <a:pPr lvl="3"/>
             <a:r>
-              <a:rPr lang="zh-TW" altLang="en-US" smtClean="0"/>
+              <a:rPr lang="zh-TW" altLang="en-US"/>
               <a:t>第四層</a:t>
             </a:r>
           </a:p>
           <a:p>
             <a:pPr lvl="4"/>
             <a:r>
-              <a:rPr lang="zh-TW" altLang="en-US" smtClean="0"/>
+              <a:rPr lang="zh-TW" altLang="en-US"/>
               <a:t>第五層</a:t>
             </a:r>
-            <a:endParaRPr lang="zh-TW" altLang="en-US"/>
           </a:p>
         </p:txBody>
       </p:sp>
@@ -1294,38 +1287,37 @@
           <a:p>
             <a:pPr lvl="0"/>
             <a:r>
-              <a:rPr lang="zh-TW" altLang="en-US" smtClean="0"/>
+              <a:rPr lang="zh-TW" altLang="en-US"/>
               <a:t>按一下以編輯母片文字樣式</a:t>
             </a:r>
           </a:p>
           <a:p>
             <a:pPr lvl="1"/>
             <a:r>
-              <a:rPr lang="zh-TW" altLang="en-US" smtClean="0"/>
+              <a:rPr lang="zh-TW" altLang="en-US"/>
               <a:t>第二層</a:t>
             </a:r>
           </a:p>
           <a:p>
             <a:pPr lvl="2"/>
             <a:r>
-              <a:rPr lang="zh-TW" altLang="en-US" smtClean="0"/>
+              <a:rPr lang="zh-TW" altLang="en-US"/>
               <a:t>第三層</a:t>
             </a:r>
           </a:p>
           <a:p>
             <a:pPr lvl="3"/>
             <a:r>
-              <a:rPr lang="zh-TW" altLang="en-US" smtClean="0"/>
+              <a:rPr lang="zh-TW" altLang="en-US"/>
               <a:t>第四層</a:t>
             </a:r>
           </a:p>
           <a:p>
             <a:pPr lvl="4"/>
             <a:r>
-              <a:rPr lang="zh-TW" altLang="en-US" smtClean="0"/>
+              <a:rPr lang="zh-TW" altLang="en-US"/>
               <a:t>第五層</a:t>
             </a:r>
-            <a:endParaRPr lang="zh-TW" altLang="en-US"/>
           </a:p>
         </p:txBody>
       </p:sp>
@@ -1347,7 +1339,7 @@
             <a:fld id="{1358C6C7-DC36-49BA-B09E-2C760A046223}" type="datetimeFigureOut">
               <a:rPr lang="zh-TW" altLang="en-US" smtClean="0"/>
               <a:pPr/>
-              <a:t>2020/1/18</a:t>
+              <a:t>2024/11/2</a:t>
             </a:fld>
             <a:endParaRPr lang="zh-TW" altLang="en-US"/>
           </a:p>
@@ -1441,10 +1433,9 @@
           </a:lstStyle>
           <a:p>
             <a:r>
-              <a:rPr lang="zh-TW" altLang="en-US" smtClean="0"/>
+              <a:rPr lang="zh-TW" altLang="en-US"/>
               <a:t>按一下以編輯母片標題樣式</a:t>
             </a:r>
-            <a:endParaRPr lang="zh-TW" altLang="en-US"/>
           </a:p>
         </p:txBody>
       </p:sp>
@@ -1507,7 +1498,7 @@
           <a:p>
             <a:pPr lvl="0"/>
             <a:r>
-              <a:rPr lang="zh-TW" altLang="en-US" smtClean="0"/>
+              <a:rPr lang="zh-TW" altLang="en-US"/>
               <a:t>按一下以編輯母片文字樣式</a:t>
             </a:r>
           </a:p>
@@ -1563,38 +1554,37 @@
           <a:p>
             <a:pPr lvl="0"/>
             <a:r>
-              <a:rPr lang="zh-TW" altLang="en-US" smtClean="0"/>
+              <a:rPr lang="zh-TW" altLang="en-US"/>
               <a:t>按一下以編輯母片文字樣式</a:t>
             </a:r>
           </a:p>
           <a:p>
             <a:pPr lvl="1"/>
             <a:r>
-              <a:rPr lang="zh-TW" altLang="en-US" smtClean="0"/>
+              <a:rPr lang="zh-TW" altLang="en-US"/>
               <a:t>第二層</a:t>
             </a:r>
           </a:p>
           <a:p>
             <a:pPr lvl="2"/>
             <a:r>
-              <a:rPr lang="zh-TW" altLang="en-US" smtClean="0"/>
+              <a:rPr lang="zh-TW" altLang="en-US"/>
               <a:t>第三層</a:t>
             </a:r>
           </a:p>
           <a:p>
             <a:pPr lvl="3"/>
             <a:r>
-              <a:rPr lang="zh-TW" altLang="en-US" smtClean="0"/>
+              <a:rPr lang="zh-TW" altLang="en-US"/>
               <a:t>第四層</a:t>
             </a:r>
           </a:p>
           <a:p>
             <a:pPr lvl="4"/>
             <a:r>
-              <a:rPr lang="zh-TW" altLang="en-US" smtClean="0"/>
+              <a:rPr lang="zh-TW" altLang="en-US"/>
               <a:t>第五層</a:t>
             </a:r>
-            <a:endParaRPr lang="zh-TW" altLang="en-US"/>
           </a:p>
         </p:txBody>
       </p:sp>
@@ -1657,7 +1647,7 @@
           <a:p>
             <a:pPr lvl="0"/>
             <a:r>
-              <a:rPr lang="zh-TW" altLang="en-US" smtClean="0"/>
+              <a:rPr lang="zh-TW" altLang="en-US"/>
               <a:t>按一下以編輯母片文字樣式</a:t>
             </a:r>
           </a:p>
@@ -1713,38 +1703,37 @@
           <a:p>
             <a:pPr lvl="0"/>
             <a:r>
-              <a:rPr lang="zh-TW" altLang="en-US" smtClean="0"/>
+              <a:rPr lang="zh-TW" altLang="en-US"/>
               <a:t>按一下以編輯母片文字樣式</a:t>
             </a:r>
           </a:p>
           <a:p>
             <a:pPr lvl="1"/>
             <a:r>
-              <a:rPr lang="zh-TW" altLang="en-US" smtClean="0"/>
+              <a:rPr lang="zh-TW" altLang="en-US"/>
               <a:t>第二層</a:t>
             </a:r>
           </a:p>
           <a:p>
             <a:pPr lvl="2"/>
             <a:r>
-              <a:rPr lang="zh-TW" altLang="en-US" smtClean="0"/>
+              <a:rPr lang="zh-TW" altLang="en-US"/>
               <a:t>第三層</a:t>
             </a:r>
           </a:p>
           <a:p>
             <a:pPr lvl="3"/>
             <a:r>
-              <a:rPr lang="zh-TW" altLang="en-US" smtClean="0"/>
+              <a:rPr lang="zh-TW" altLang="en-US"/>
               <a:t>第四層</a:t>
             </a:r>
           </a:p>
           <a:p>
             <a:pPr lvl="4"/>
             <a:r>
-              <a:rPr lang="zh-TW" altLang="en-US" smtClean="0"/>
+              <a:rPr lang="zh-TW" altLang="en-US"/>
               <a:t>第五層</a:t>
             </a:r>
-            <a:endParaRPr lang="zh-TW" altLang="en-US"/>
           </a:p>
         </p:txBody>
       </p:sp>
@@ -1766,7 +1755,7 @@
             <a:fld id="{1358C6C7-DC36-49BA-B09E-2C760A046223}" type="datetimeFigureOut">
               <a:rPr lang="zh-TW" altLang="en-US" smtClean="0"/>
               <a:pPr/>
-              <a:t>2020/1/18</a:t>
+              <a:t>2024/11/2</a:t>
             </a:fld>
             <a:endParaRPr lang="zh-TW" altLang="en-US"/>
           </a:p>
@@ -1856,10 +1845,9 @@
           <a:lstStyle/>
           <a:p>
             <a:r>
-              <a:rPr lang="zh-TW" altLang="en-US" smtClean="0"/>
+              <a:rPr lang="zh-TW" altLang="en-US"/>
               <a:t>按一下以編輯母片標題樣式</a:t>
             </a:r>
-            <a:endParaRPr lang="zh-TW" altLang="en-US"/>
           </a:p>
         </p:txBody>
       </p:sp>
@@ -1881,7 +1869,7 @@
             <a:fld id="{1358C6C7-DC36-49BA-B09E-2C760A046223}" type="datetimeFigureOut">
               <a:rPr lang="zh-TW" altLang="en-US" smtClean="0"/>
               <a:pPr/>
-              <a:t>2020/1/18</a:t>
+              <a:t>2024/11/2</a:t>
             </a:fld>
             <a:endParaRPr lang="zh-TW" altLang="en-US"/>
           </a:p>
@@ -1973,7 +1961,7 @@
             <a:fld id="{1358C6C7-DC36-49BA-B09E-2C760A046223}" type="datetimeFigureOut">
               <a:rPr lang="zh-TW" altLang="en-US" smtClean="0"/>
               <a:pPr/>
-              <a:t>2020/1/18</a:t>
+              <a:t>2024/11/2</a:t>
             </a:fld>
             <a:endParaRPr lang="zh-TW" altLang="en-US"/>
           </a:p>
@@ -2072,10 +2060,9 @@
           </a:lstStyle>
           <a:p>
             <a:r>
-              <a:rPr lang="zh-TW" altLang="en-US" smtClean="0"/>
+              <a:rPr lang="zh-TW" altLang="en-US"/>
               <a:t>按一下以編輯母片標題樣式</a:t>
             </a:r>
-            <a:endParaRPr lang="zh-TW" altLang="en-US"/>
           </a:p>
         </p:txBody>
       </p:sp>
@@ -2129,38 +2116,37 @@
           <a:p>
             <a:pPr lvl="0"/>
             <a:r>
-              <a:rPr lang="zh-TW" altLang="en-US" smtClean="0"/>
+              <a:rPr lang="zh-TW" altLang="en-US"/>
               <a:t>按一下以編輯母片文字樣式</a:t>
             </a:r>
           </a:p>
           <a:p>
             <a:pPr lvl="1"/>
             <a:r>
-              <a:rPr lang="zh-TW" altLang="en-US" smtClean="0"/>
+              <a:rPr lang="zh-TW" altLang="en-US"/>
               <a:t>第二層</a:t>
             </a:r>
           </a:p>
           <a:p>
             <a:pPr lvl="2"/>
             <a:r>
-              <a:rPr lang="zh-TW" altLang="en-US" smtClean="0"/>
+              <a:rPr lang="zh-TW" altLang="en-US"/>
               <a:t>第三層</a:t>
             </a:r>
           </a:p>
           <a:p>
             <a:pPr lvl="3"/>
             <a:r>
-              <a:rPr lang="zh-TW" altLang="en-US" smtClean="0"/>
+              <a:rPr lang="zh-TW" altLang="en-US"/>
               <a:t>第四層</a:t>
             </a:r>
           </a:p>
           <a:p>
             <a:pPr lvl="4"/>
             <a:r>
-              <a:rPr lang="zh-TW" altLang="en-US" smtClean="0"/>
+              <a:rPr lang="zh-TW" altLang="en-US"/>
               <a:t>第五層</a:t>
             </a:r>
-            <a:endParaRPr lang="zh-TW" altLang="en-US"/>
           </a:p>
         </p:txBody>
       </p:sp>
@@ -2223,7 +2209,7 @@
           <a:p>
             <a:pPr lvl="0"/>
             <a:r>
-              <a:rPr lang="zh-TW" altLang="en-US" smtClean="0"/>
+              <a:rPr lang="zh-TW" altLang="en-US"/>
               <a:t>按一下以編輯母片文字樣式</a:t>
             </a:r>
           </a:p>
@@ -2247,7 +2233,7 @@
             <a:fld id="{1358C6C7-DC36-49BA-B09E-2C760A046223}" type="datetimeFigureOut">
               <a:rPr lang="zh-TW" altLang="en-US" smtClean="0"/>
               <a:pPr/>
-              <a:t>2020/1/18</a:t>
+              <a:t>2024/11/2</a:t>
             </a:fld>
             <a:endParaRPr lang="zh-TW" altLang="en-US"/>
           </a:p>
@@ -2346,10 +2332,9 @@
           </a:lstStyle>
           <a:p>
             <a:r>
-              <a:rPr lang="zh-TW" altLang="en-US" smtClean="0"/>
+              <a:rPr lang="zh-TW" altLang="en-US"/>
               <a:t>按一下以編輯母片標題樣式</a:t>
             </a:r>
-            <a:endParaRPr lang="zh-TW" altLang="en-US"/>
           </a:p>
         </p:txBody>
       </p:sp>
@@ -2411,10 +2396,9 @@
           </a:lstStyle>
           <a:p>
             <a:r>
-              <a:rPr lang="zh-TW" altLang="en-US" smtClean="0"/>
+              <a:rPr lang="zh-TW" altLang="en-US"/>
               <a:t>按一下圖示以新增圖片</a:t>
             </a:r>
-            <a:endParaRPr lang="zh-TW" altLang="en-US"/>
           </a:p>
         </p:txBody>
       </p:sp>
@@ -2477,7 +2461,7 @@
           <a:p>
             <a:pPr lvl="0"/>
             <a:r>
-              <a:rPr lang="zh-TW" altLang="en-US" smtClean="0"/>
+              <a:rPr lang="zh-TW" altLang="en-US"/>
               <a:t>按一下以編輯母片文字樣式</a:t>
             </a:r>
           </a:p>
@@ -2501,7 +2485,7 @@
             <a:fld id="{1358C6C7-DC36-49BA-B09E-2C760A046223}" type="datetimeFigureOut">
               <a:rPr lang="zh-TW" altLang="en-US" smtClean="0"/>
               <a:pPr/>
-              <a:t>2020/1/18</a:t>
+              <a:t>2024/11/2</a:t>
             </a:fld>
             <a:endParaRPr lang="zh-TW" altLang="en-US"/>
           </a:p>
@@ -2611,10 +2595,9 @@
           <a:lstStyle/>
           <a:p>
             <a:r>
-              <a:rPr lang="zh-TW" altLang="en-US" smtClean="0"/>
+              <a:rPr lang="zh-TW" altLang="en-US"/>
               <a:t>按一下以編輯母片標題樣式</a:t>
             </a:r>
-            <a:endParaRPr lang="zh-TW" altLang="en-US"/>
           </a:p>
         </p:txBody>
       </p:sp>
@@ -2645,38 +2628,37 @@
           <a:p>
             <a:pPr lvl="0"/>
             <a:r>
-              <a:rPr lang="zh-TW" altLang="en-US" smtClean="0"/>
+              <a:rPr lang="zh-TW" altLang="en-US"/>
               <a:t>按一下以編輯母片文字樣式</a:t>
             </a:r>
           </a:p>
           <a:p>
             <a:pPr lvl="1"/>
             <a:r>
-              <a:rPr lang="zh-TW" altLang="en-US" smtClean="0"/>
+              <a:rPr lang="zh-TW" altLang="en-US"/>
               <a:t>第二層</a:t>
             </a:r>
           </a:p>
           <a:p>
             <a:pPr lvl="2"/>
             <a:r>
-              <a:rPr lang="zh-TW" altLang="en-US" smtClean="0"/>
+              <a:rPr lang="zh-TW" altLang="en-US"/>
               <a:t>第三層</a:t>
             </a:r>
           </a:p>
           <a:p>
             <a:pPr lvl="3"/>
             <a:r>
-              <a:rPr lang="zh-TW" altLang="en-US" smtClean="0"/>
+              <a:rPr lang="zh-TW" altLang="en-US"/>
               <a:t>第四層</a:t>
             </a:r>
           </a:p>
           <a:p>
             <a:pPr lvl="4"/>
             <a:r>
-              <a:rPr lang="zh-TW" altLang="en-US" smtClean="0"/>
+              <a:rPr lang="zh-TW" altLang="en-US"/>
               <a:t>第五層</a:t>
             </a:r>
-            <a:endParaRPr lang="zh-TW" altLang="en-US"/>
           </a:p>
         </p:txBody>
       </p:sp>
@@ -2716,7 +2698,7 @@
             <a:fld id="{1358C6C7-DC36-49BA-B09E-2C760A046223}" type="datetimeFigureOut">
               <a:rPr lang="zh-TW" altLang="en-US" smtClean="0"/>
               <a:pPr/>
-              <a:t>2020/1/18</a:t>
+              <a:t>2024/11/2</a:t>
             </a:fld>
             <a:endParaRPr lang="zh-TW" altLang="en-US"/>
           </a:p>
@@ -3097,289 +3079,66 @@
             <p:ph type="title"/>
           </p:nvPr>
         </p:nvSpPr>
-        <p:spPr/>
+        <p:spPr>
+          <a:xfrm>
+            <a:off x="0" y="1995686"/>
+            <a:ext cx="9144000" cy="857250"/>
+          </a:xfrm>
+        </p:spPr>
         <p:txBody>
           <a:bodyPr>
-            <a:normAutofit/>
+            <a:noAutofit/>
           </a:bodyPr>
           <a:lstStyle/>
           <a:p>
             <a:r>
-              <a:rPr lang="zh-TW" altLang="en-US" sz="4000" b="1" dirty="0" smtClean="0">
-                <a:solidFill>
-                  <a:srgbClr val="660033"/>
-                </a:solidFill>
+              <a:rPr lang="zh-TW" altLang="en-US" sz="5400" b="1" i="1" dirty="0">
+                <a:solidFill>
+                  <a:srgbClr val="660033"/>
+                </a:solidFill>
+                <a:effectLst>
+                  <a:outerShdw blurRad="38100" dist="38100" dir="2700000" algn="tl">
+                    <a:srgbClr val="000000">
+                      <a:alpha val="43137"/>
+                    </a:srgbClr>
+                  </a:outerShdw>
+                </a:effectLst>
                 <a:latin typeface="微軟正黑體" pitchFamily="34" charset="-120"/>
                 <a:ea typeface="微軟正黑體" pitchFamily="34" charset="-120"/>
               </a:rPr>
-              <a:t>我心切切渴</a:t>
-            </a:r>
-            <a:r>
-              <a:rPr lang="zh-TW" altLang="en-US" sz="4000" b="1" dirty="0" smtClean="0">
-                <a:solidFill>
-                  <a:srgbClr val="660033"/>
-                </a:solidFill>
+              <a:t>我心切切渴慕</a:t>
+            </a:r>
+            <a:r>
+              <a:rPr lang="zh-CN" altLang="en-US" sz="5400" b="1" i="1" dirty="0">
+                <a:solidFill>
+                  <a:srgbClr val="660033"/>
+                </a:solidFill>
+                <a:effectLst>
+                  <a:outerShdw blurRad="38100" dist="38100" dir="2700000" algn="tl">
+                    <a:srgbClr val="000000">
+                      <a:alpha val="43137"/>
+                    </a:srgbClr>
+                  </a:outerShdw>
+                </a:effectLst>
                 <a:latin typeface="微軟正黑體" pitchFamily="34" charset="-120"/>
                 <a:ea typeface="微軟正黑體" pitchFamily="34" charset="-120"/>
               </a:rPr>
-              <a:t>慕</a:t>
-            </a:r>
-            <a:r>
-              <a:rPr lang="zh-CN" altLang="en-US" sz="4000" b="1" dirty="0" smtClean="0">
-                <a:solidFill>
-                  <a:srgbClr val="660033"/>
-                </a:solidFill>
-                <a:latin typeface="微軟正黑體" pitchFamily="34" charset="-120"/>
-                <a:ea typeface="微軟正黑體" pitchFamily="34" charset="-120"/>
-              </a:rPr>
-              <a:t>袮</a:t>
-            </a:r>
-            <a:endParaRPr lang="zh-TW" altLang="en-US" sz="4000" b="1" dirty="0">
+              <a:t>祢</a:t>
+            </a:r>
+            <a:endParaRPr lang="zh-TW" altLang="en-US" sz="5400" b="1" i="1" dirty="0">
               <a:solidFill>
                 <a:srgbClr val="660033"/>
               </a:solidFill>
+              <a:effectLst>
+                <a:outerShdw blurRad="38100" dist="38100" dir="2700000" algn="tl">
+                  <a:srgbClr val="000000">
+                    <a:alpha val="43137"/>
+                  </a:srgbClr>
+                </a:outerShdw>
+              </a:effectLst>
               <a:latin typeface="微軟正黑體" pitchFamily="34" charset="-120"/>
               <a:ea typeface="微軟正黑體" pitchFamily="34" charset="-120"/>
             </a:endParaRPr>
-          </a:p>
-        </p:txBody>
-      </p:sp>
-      <p:sp>
-        <p:nvSpPr>
-          <p:cNvPr id="5" name="內容版面配置區 4"/>
-          <p:cNvSpPr>
-            <a:spLocks noGrp="1"/>
-          </p:cNvSpPr>
-          <p:nvPr>
-            <p:ph idx="1"/>
-          </p:nvPr>
-        </p:nvSpPr>
-        <p:spPr/>
-        <p:txBody>
-          <a:bodyPr>
-            <a:noAutofit/>
-          </a:bodyPr>
-          <a:lstStyle/>
-          <a:p>
-            <a:pPr algn="ctr">
-              <a:buNone/>
-            </a:pPr>
-            <a:r>
-              <a:rPr lang="zh-TW" altLang="en-US" sz="4800" b="1" dirty="0">
-                <a:solidFill>
-                  <a:srgbClr val="660033"/>
-                </a:solidFill>
-                <a:latin typeface="微軟正黑體" pitchFamily="34" charset="-120"/>
-                <a:ea typeface="微軟正黑體" pitchFamily="34" charset="-120"/>
-              </a:rPr>
-              <a:t>我心切切渴</a:t>
-            </a:r>
-            <a:r>
-              <a:rPr lang="zh-TW" altLang="en-US" sz="4800" b="1" dirty="0" smtClean="0">
-                <a:solidFill>
-                  <a:srgbClr val="660033"/>
-                </a:solidFill>
-                <a:latin typeface="微軟正黑體" pitchFamily="34" charset="-120"/>
-                <a:ea typeface="微軟正黑體" pitchFamily="34" charset="-120"/>
-              </a:rPr>
-              <a:t>慕</a:t>
-            </a:r>
-            <a:r>
-              <a:rPr lang="zh-CN" altLang="en-US" sz="4800" b="1" dirty="0">
-                <a:solidFill>
-                  <a:srgbClr val="660033"/>
-                </a:solidFill>
-                <a:latin typeface="微軟正黑體" pitchFamily="34" charset="-120"/>
-                <a:ea typeface="微軟正黑體" pitchFamily="34" charset="-120"/>
-              </a:rPr>
-              <a:t>袮</a:t>
-            </a:r>
-            <a:endParaRPr lang="en-US" altLang="zh-TW" sz="4800" b="1" dirty="0" smtClean="0">
-              <a:solidFill>
-                <a:srgbClr val="660033"/>
-              </a:solidFill>
-              <a:latin typeface="微軟正黑體" pitchFamily="34" charset="-120"/>
-              <a:ea typeface="微軟正黑體" pitchFamily="34" charset="-120"/>
-            </a:endParaRPr>
-          </a:p>
-          <a:p>
-            <a:pPr algn="ctr">
-              <a:buNone/>
-            </a:pPr>
-            <a:r>
-              <a:rPr lang="zh-TW" altLang="en-US" sz="4800" b="1" dirty="0" smtClean="0">
-                <a:solidFill>
-                  <a:srgbClr val="660033"/>
-                </a:solidFill>
-                <a:latin typeface="微軟正黑體" pitchFamily="34" charset="-120"/>
-                <a:ea typeface="微軟正黑體" pitchFamily="34" charset="-120"/>
-              </a:rPr>
-              <a:t>乾旱</a:t>
-            </a:r>
-            <a:r>
-              <a:rPr lang="zh-TW" altLang="en-US" sz="4800" b="1" dirty="0">
-                <a:solidFill>
-                  <a:srgbClr val="660033"/>
-                </a:solidFill>
-                <a:latin typeface="微軟正黑體" pitchFamily="34" charset="-120"/>
-                <a:ea typeface="微軟正黑體" pitchFamily="34" charset="-120"/>
-              </a:rPr>
-              <a:t>疲乏無水之</a:t>
-            </a:r>
-            <a:r>
-              <a:rPr lang="zh-TW" altLang="en-US" sz="4800" b="1" dirty="0" smtClean="0">
-                <a:solidFill>
-                  <a:srgbClr val="660033"/>
-                </a:solidFill>
-                <a:latin typeface="微軟正黑體" pitchFamily="34" charset="-120"/>
-                <a:ea typeface="微軟正黑體" pitchFamily="34" charset="-120"/>
-              </a:rPr>
-              <a:t>地</a:t>
-            </a:r>
-            <a:endParaRPr lang="en-US" altLang="zh-TW" sz="4800" b="1" dirty="0">
-              <a:solidFill>
-                <a:srgbClr val="660033"/>
-              </a:solidFill>
-              <a:latin typeface="微軟正黑體" pitchFamily="34" charset="-120"/>
-              <a:ea typeface="微軟正黑體" pitchFamily="34" charset="-120"/>
-            </a:endParaRPr>
-          </a:p>
-          <a:p>
-            <a:pPr algn="ctr">
-              <a:buNone/>
-            </a:pPr>
-            <a:r>
-              <a:rPr lang="zh-CN" altLang="en-US" sz="4800" b="1" dirty="0">
-                <a:solidFill>
-                  <a:srgbClr val="660033"/>
-                </a:solidFill>
-                <a:latin typeface="微軟正黑體" pitchFamily="34" charset="-120"/>
-                <a:ea typeface="微軟正黑體" pitchFamily="34" charset="-120"/>
-              </a:rPr>
-              <a:t>袮</a:t>
-            </a:r>
-            <a:r>
-              <a:rPr lang="zh-TW" altLang="en-US" sz="4800" b="1" dirty="0" smtClean="0">
-                <a:solidFill>
-                  <a:srgbClr val="660033"/>
-                </a:solidFill>
-                <a:latin typeface="微軟正黑體" pitchFamily="34" charset="-120"/>
-                <a:ea typeface="微軟正黑體" pitchFamily="34" charset="-120"/>
-              </a:rPr>
-              <a:t>是</a:t>
-            </a:r>
-            <a:r>
-              <a:rPr lang="zh-TW" altLang="en-US" sz="4800" b="1" dirty="0">
-                <a:solidFill>
-                  <a:srgbClr val="660033"/>
-                </a:solidFill>
-                <a:latin typeface="微軟正黑體" pitchFamily="34" charset="-120"/>
-                <a:ea typeface="微軟正黑體" pitchFamily="34" charset="-120"/>
-              </a:rPr>
-              <a:t>我</a:t>
-            </a:r>
-            <a:r>
-              <a:rPr lang="zh-TW" altLang="en-US" sz="4800" b="1" dirty="0" smtClean="0">
-                <a:solidFill>
-                  <a:srgbClr val="660033"/>
-                </a:solidFill>
-                <a:latin typeface="微軟正黑體" pitchFamily="34" charset="-120"/>
-                <a:ea typeface="微軟正黑體" pitchFamily="34" charset="-120"/>
-              </a:rPr>
-              <a:t>一切</a:t>
-            </a:r>
-            <a:r>
-              <a:rPr lang="en-US" altLang="zh-TW" sz="4800" b="1" dirty="0">
-                <a:solidFill>
-                  <a:srgbClr val="660033"/>
-                </a:solidFill>
-                <a:latin typeface="微軟正黑體" pitchFamily="34" charset="-120"/>
-                <a:ea typeface="微軟正黑體" pitchFamily="34" charset="-120"/>
-              </a:rPr>
-              <a:t> </a:t>
-            </a:r>
-            <a:r>
-              <a:rPr lang="en-US" altLang="zh-TW" sz="4800" b="1" dirty="0" smtClean="0">
-                <a:solidFill>
-                  <a:srgbClr val="660033"/>
-                </a:solidFill>
-                <a:latin typeface="微軟正黑體" pitchFamily="34" charset="-120"/>
-                <a:ea typeface="微軟正黑體" pitchFamily="34" charset="-120"/>
-              </a:rPr>
-              <a:t> </a:t>
-            </a:r>
-            <a:r>
-              <a:rPr lang="zh-TW" altLang="en-US" sz="4800" b="1" dirty="0" smtClean="0">
-                <a:solidFill>
-                  <a:srgbClr val="660033"/>
-                </a:solidFill>
-                <a:latin typeface="微軟正黑體" pitchFamily="34" charset="-120"/>
-                <a:ea typeface="微軟正黑體" pitchFamily="34" charset="-120"/>
-              </a:rPr>
-              <a:t>我</a:t>
-            </a:r>
-            <a:r>
-              <a:rPr lang="zh-TW" altLang="en-US" sz="4800" b="1" dirty="0">
-                <a:solidFill>
-                  <a:srgbClr val="660033"/>
-                </a:solidFill>
-                <a:latin typeface="微軟正黑體" pitchFamily="34" charset="-120"/>
-                <a:ea typeface="微軟正黑體" pitchFamily="34" charset="-120"/>
-              </a:rPr>
-              <a:t>心完全屬</a:t>
-            </a:r>
-            <a:r>
-              <a:rPr lang="zh-TW" altLang="en-US" sz="4800" b="1" dirty="0" smtClean="0">
-                <a:solidFill>
-                  <a:srgbClr val="660033"/>
-                </a:solidFill>
-                <a:latin typeface="微軟正黑體" pitchFamily="34" charset="-120"/>
-                <a:ea typeface="微軟正黑體" pitchFamily="34" charset="-120"/>
-              </a:rPr>
-              <a:t>於</a:t>
-            </a:r>
-            <a:r>
-              <a:rPr lang="zh-CN" altLang="en-US" sz="4800" b="1" dirty="0">
-                <a:solidFill>
-                  <a:srgbClr val="660033"/>
-                </a:solidFill>
-                <a:latin typeface="微軟正黑體" pitchFamily="34" charset="-120"/>
-                <a:ea typeface="微軟正黑體" pitchFamily="34" charset="-120"/>
-              </a:rPr>
-              <a:t>袮</a:t>
-            </a:r>
-            <a:endParaRPr lang="en-US" altLang="zh-TW" sz="4800" b="1" dirty="0" smtClean="0">
-              <a:solidFill>
-                <a:srgbClr val="660033"/>
-              </a:solidFill>
-              <a:latin typeface="微軟正黑體" pitchFamily="34" charset="-120"/>
-              <a:ea typeface="微軟正黑體" pitchFamily="34" charset="-120"/>
-            </a:endParaRPr>
-          </a:p>
-          <a:p>
-            <a:pPr algn="ctr">
-              <a:buNone/>
-            </a:pPr>
-            <a:r>
-              <a:rPr lang="zh-TW" altLang="en-US" sz="4800" b="1" dirty="0" smtClean="0">
-                <a:solidFill>
-                  <a:srgbClr val="660033"/>
-                </a:solidFill>
-                <a:latin typeface="微軟正黑體" pitchFamily="34" charset="-120"/>
-                <a:ea typeface="微軟正黑體" pitchFamily="34" charset="-120"/>
-              </a:rPr>
-              <a:t>只</a:t>
-            </a:r>
-            <a:r>
-              <a:rPr lang="zh-TW" altLang="en-US" sz="4800" b="1" dirty="0">
-                <a:solidFill>
-                  <a:srgbClr val="660033"/>
-                </a:solidFill>
-                <a:latin typeface="微軟正黑體" pitchFamily="34" charset="-120"/>
-                <a:ea typeface="微軟正黑體" pitchFamily="34" charset="-120"/>
-              </a:rPr>
-              <a:t>願更多與你相親</a:t>
-            </a:r>
           </a:p>
         </p:txBody>
       </p:sp>
@@ -3410,110 +3169,48 @@
       </p:grpSpPr>
       <p:sp>
         <p:nvSpPr>
-          <p:cNvPr id="4" name="標題 3"/>
-          <p:cNvSpPr>
-            <a:spLocks noGrp="1"/>
-          </p:cNvSpPr>
-          <p:nvPr>
-            <p:ph type="title"/>
-          </p:nvPr>
-        </p:nvSpPr>
-        <p:spPr/>
-        <p:txBody>
-          <a:bodyPr>
+          <p:cNvPr id="5" name="內容版面配置區 4"/>
+          <p:cNvSpPr>
+            <a:spLocks noGrp="1"/>
+          </p:cNvSpPr>
+          <p:nvPr>
+            <p:ph idx="1"/>
+          </p:nvPr>
+        </p:nvSpPr>
+        <p:spPr>
+          <a:xfrm>
+            <a:off x="0" y="1563638"/>
+            <a:ext cx="9144000" cy="1803647"/>
+          </a:xfrm>
+        </p:spPr>
+        <p:txBody>
+          <a:bodyPr anchor="ctr">
             <a:normAutofit/>
           </a:bodyPr>
           <a:lstStyle/>
           <a:p>
-            <a:r>
-              <a:rPr lang="zh-TW" altLang="en-US" sz="4000" b="1" dirty="0">
+            <a:pPr algn="ctr">
+              <a:buNone/>
+            </a:pPr>
+            <a:r>
+              <a:rPr lang="zh-TW" altLang="en-US" sz="4800" b="1" dirty="0">
                 <a:solidFill>
                   <a:srgbClr val="660033"/>
                 </a:solidFill>
                 <a:latin typeface="微軟正黑體" pitchFamily="34" charset="-120"/>
                 <a:ea typeface="微軟正黑體" pitchFamily="34" charset="-120"/>
               </a:rPr>
-              <a:t>我心切切渴</a:t>
-            </a:r>
-            <a:r>
-              <a:rPr lang="zh-TW" altLang="en-US" sz="4000" b="1" dirty="0" smtClean="0">
+              <a:t>我心切切渴慕</a:t>
+            </a:r>
+            <a:r>
+              <a:rPr lang="zh-CN" altLang="en-US" sz="4800" b="1" dirty="0">
                 <a:solidFill>
                   <a:srgbClr val="660033"/>
                 </a:solidFill>
                 <a:latin typeface="微軟正黑體" pitchFamily="34" charset="-120"/>
                 <a:ea typeface="微軟正黑體" pitchFamily="34" charset="-120"/>
               </a:rPr>
-              <a:t>慕</a:t>
-            </a:r>
-            <a:r>
-              <a:rPr lang="zh-CN" altLang="en-US" sz="4000" b="1" dirty="0">
-                <a:solidFill>
-                  <a:srgbClr val="660033"/>
-                </a:solidFill>
-                <a:latin typeface="微軟正黑體" pitchFamily="34" charset="-120"/>
-                <a:ea typeface="微軟正黑體" pitchFamily="34" charset="-120"/>
-              </a:rPr>
-              <a:t>袮</a:t>
-            </a:r>
-            <a:endParaRPr lang="zh-TW" altLang="en-US" sz="4000" b="1" dirty="0">
-              <a:solidFill>
-                <a:srgbClr val="660033"/>
-              </a:solidFill>
-              <a:latin typeface="微軟正黑體" pitchFamily="34" charset="-120"/>
-              <a:ea typeface="微軟正黑體" pitchFamily="34" charset="-120"/>
-            </a:endParaRPr>
-          </a:p>
-        </p:txBody>
-      </p:sp>
-      <p:sp>
-        <p:nvSpPr>
-          <p:cNvPr id="5" name="內容版面配置區 4"/>
-          <p:cNvSpPr>
-            <a:spLocks noGrp="1"/>
-          </p:cNvSpPr>
-          <p:nvPr>
-            <p:ph idx="1"/>
-          </p:nvPr>
-        </p:nvSpPr>
-        <p:spPr/>
-        <p:txBody>
-          <a:bodyPr>
-            <a:noAutofit/>
-          </a:bodyPr>
-          <a:lstStyle/>
-          <a:p>
-            <a:pPr algn="ctr">
-              <a:buNone/>
-            </a:pPr>
-            <a:r>
-              <a:rPr lang="zh-TW" altLang="en-US" sz="4800" b="1" dirty="0">
-                <a:solidFill>
-                  <a:srgbClr val="660033"/>
-                </a:solidFill>
-                <a:latin typeface="微軟正黑體" pitchFamily="34" charset="-120"/>
-                <a:ea typeface="微軟正黑體" pitchFamily="34" charset="-120"/>
-              </a:rPr>
-              <a:t>我要切切尋</a:t>
-            </a:r>
-            <a:r>
-              <a:rPr lang="zh-TW" altLang="en-US" sz="4800" b="1" dirty="0" smtClean="0">
-                <a:solidFill>
-                  <a:srgbClr val="660033"/>
-                </a:solidFill>
-                <a:latin typeface="微軟正黑體" pitchFamily="34" charset="-120"/>
-                <a:ea typeface="微軟正黑體" pitchFamily="34" charset="-120"/>
-              </a:rPr>
-              <a:t>求</a:t>
-            </a:r>
-            <a:r>
-              <a:rPr lang="zh-CN" altLang="en-US" sz="4800" b="1" dirty="0">
-                <a:solidFill>
-                  <a:srgbClr val="660033"/>
-                </a:solidFill>
-                <a:latin typeface="微軟正黑體" pitchFamily="34" charset="-120"/>
-                <a:ea typeface="微軟正黑體" pitchFamily="34" charset="-120"/>
-              </a:rPr>
-              <a:t>袮</a:t>
+              <a:t>祢</a:t>
             </a:r>
             <a:endParaRPr lang="en-US" altLang="zh-TW" sz="4800" b="1" dirty="0">
               <a:solidFill>
@@ -3545,162 +3242,67 @@
               <a:ea typeface="微軟正黑體" pitchFamily="34" charset="-120"/>
             </a:endParaRPr>
           </a:p>
-          <a:p>
-            <a:pPr algn="ctr">
-              <a:buNone/>
-            </a:pPr>
-            <a:r>
-              <a:rPr lang="zh-CN" altLang="en-US" sz="4800" b="1" dirty="0">
-                <a:solidFill>
-                  <a:srgbClr val="660033"/>
-                </a:solidFill>
-                <a:latin typeface="微軟正黑體" pitchFamily="34" charset="-120"/>
-                <a:ea typeface="微軟正黑體" pitchFamily="34" charset="-120"/>
-              </a:rPr>
-              <a:t>袮</a:t>
-            </a:r>
-            <a:r>
-              <a:rPr lang="zh-TW" altLang="en-US" sz="4800" b="1" dirty="0" smtClean="0">
-                <a:solidFill>
-                  <a:srgbClr val="660033"/>
-                </a:solidFill>
-                <a:latin typeface="微軟正黑體" pitchFamily="34" charset="-120"/>
-                <a:ea typeface="微軟正黑體" pitchFamily="34" charset="-120"/>
-              </a:rPr>
-              <a:t>是</a:t>
-            </a:r>
-            <a:r>
-              <a:rPr lang="zh-TW" altLang="en-US" sz="4800" b="1" dirty="0">
-                <a:solidFill>
-                  <a:srgbClr val="660033"/>
-                </a:solidFill>
-                <a:latin typeface="微軟正黑體" pitchFamily="34" charset="-120"/>
-                <a:ea typeface="微軟正黑體" pitchFamily="34" charset="-120"/>
-              </a:rPr>
-              <a:t>我一</a:t>
-            </a:r>
-            <a:r>
-              <a:rPr lang="zh-TW" altLang="en-US" sz="4800" b="1" dirty="0" smtClean="0">
-                <a:solidFill>
-                  <a:srgbClr val="660033"/>
-                </a:solidFill>
-                <a:latin typeface="微軟正黑體" pitchFamily="34" charset="-120"/>
-                <a:ea typeface="微軟正黑體" pitchFamily="34" charset="-120"/>
-              </a:rPr>
-              <a:t>切</a:t>
-            </a:r>
-            <a:r>
-              <a:rPr lang="en-US" altLang="zh-TW" sz="4800" b="1" dirty="0" smtClean="0">
-                <a:solidFill>
-                  <a:srgbClr val="660033"/>
-                </a:solidFill>
-                <a:latin typeface="微軟正黑體" pitchFamily="34" charset="-120"/>
-                <a:ea typeface="微軟正黑體" pitchFamily="34" charset="-120"/>
-              </a:rPr>
-              <a:t>  </a:t>
-            </a:r>
-            <a:r>
-              <a:rPr lang="zh-TW" altLang="en-US" sz="4800" b="1" dirty="0" smtClean="0">
-                <a:solidFill>
-                  <a:srgbClr val="660033"/>
-                </a:solidFill>
-                <a:latin typeface="微軟正黑體" pitchFamily="34" charset="-120"/>
-                <a:ea typeface="微軟正黑體" pitchFamily="34" charset="-120"/>
-              </a:rPr>
-              <a:t>我</a:t>
-            </a:r>
-            <a:r>
-              <a:rPr lang="zh-TW" altLang="en-US" sz="4800" b="1" dirty="0">
-                <a:solidFill>
-                  <a:srgbClr val="660033"/>
-                </a:solidFill>
-                <a:latin typeface="微軟正黑體" pitchFamily="34" charset="-120"/>
-                <a:ea typeface="微軟正黑體" pitchFamily="34" charset="-120"/>
-              </a:rPr>
-              <a:t>心不住思</a:t>
-            </a:r>
-            <a:r>
-              <a:rPr lang="zh-TW" altLang="en-US" sz="4800" b="1" dirty="0" smtClean="0">
-                <a:solidFill>
-                  <a:srgbClr val="660033"/>
-                </a:solidFill>
-                <a:latin typeface="微軟正黑體" pitchFamily="34" charset="-120"/>
-                <a:ea typeface="微軟正黑體" pitchFamily="34" charset="-120"/>
-              </a:rPr>
-              <a:t>念</a:t>
-            </a:r>
-            <a:r>
-              <a:rPr lang="zh-CN" altLang="en-US" sz="4800" b="1" dirty="0">
-                <a:solidFill>
-                  <a:srgbClr val="660033"/>
-                </a:solidFill>
-                <a:latin typeface="微軟正黑體" pitchFamily="34" charset="-120"/>
-                <a:ea typeface="微軟正黑體" pitchFamily="34" charset="-120"/>
-              </a:rPr>
-              <a:t>袮</a:t>
-            </a:r>
-            <a:endParaRPr lang="en-US" altLang="zh-TW" sz="4800" b="1" dirty="0">
+        </p:txBody>
+      </p:sp>
+      <p:sp>
+        <p:nvSpPr>
+          <p:cNvPr id="3" name="TextBox 2"/>
+          <p:cNvSpPr txBox="1"/>
+          <p:nvPr/>
+        </p:nvSpPr>
+        <p:spPr>
+          <a:xfrm>
+            <a:off x="0" y="3867894"/>
+            <a:ext cx="9144000" cy="461665"/>
+          </a:xfrm>
+          <a:prstGeom prst="rect">
+            <a:avLst/>
+          </a:prstGeom>
+          <a:noFill/>
+        </p:spPr>
+        <p:txBody>
+          <a:bodyPr wrap="square" rtlCol="0">
+            <a:spAutoFit/>
+          </a:bodyPr>
+          <a:lstStyle/>
+          <a:p>
+            <a:pPr algn="ctr"/>
+            <a:r>
+              <a:rPr lang="en-US" sz="2400" b="1" dirty="0">
+                <a:solidFill>
+                  <a:srgbClr val="660033"/>
+                </a:solidFill>
+                <a:latin typeface="Microsoft JhengHei" panose="020B0604030504040204" pitchFamily="34" charset="-120"/>
+                <a:ea typeface="Microsoft JhengHei" panose="020B0604030504040204" pitchFamily="34" charset="-120"/>
+              </a:rPr>
+              <a:t>( </a:t>
+            </a:r>
+            <a:r>
+              <a:rPr lang="zh-CN" altLang="en-US" sz="2400" b="1" dirty="0">
+                <a:solidFill>
+                  <a:srgbClr val="660033"/>
+                </a:solidFill>
+                <a:latin typeface="Microsoft JhengHei" panose="020B0604030504040204" pitchFamily="34" charset="-120"/>
+                <a:ea typeface="Microsoft JhengHei" panose="020B0604030504040204" pitchFamily="34" charset="-120"/>
+              </a:rPr>
+              <a:t>正歌</a:t>
+            </a:r>
+            <a:r>
+              <a:rPr lang="en-US" sz="2400" b="1" dirty="0">
+                <a:solidFill>
+                  <a:srgbClr val="660033"/>
+                </a:solidFill>
+                <a:latin typeface="Microsoft JhengHei" panose="020B0604030504040204" pitchFamily="34" charset="-120"/>
+                <a:ea typeface="Microsoft JhengHei" panose="020B0604030504040204" pitchFamily="34" charset="-120"/>
+              </a:rPr>
+              <a:t> )</a:t>
+            </a:r>
+            <a:endParaRPr lang="vi-VN" sz="2400" b="1" dirty="0">
               <a:solidFill>
                 <a:srgbClr val="660033"/>
               </a:solidFill>
-              <a:latin typeface="微軟正黑體" pitchFamily="34" charset="-120"/>
-              <a:ea typeface="微軟正黑體" pitchFamily="34" charset="-120"/>
+              <a:ea typeface="Microsoft JhengHei" panose="020B0604030504040204" pitchFamily="34" charset="-120"/>
             </a:endParaRPr>
-          </a:p>
-          <a:p>
-            <a:pPr algn="ctr">
-              <a:buNone/>
-            </a:pPr>
-            <a:r>
-              <a:rPr lang="zh-TW" altLang="en-US" sz="4800" b="1" dirty="0">
-                <a:solidFill>
-                  <a:srgbClr val="660033"/>
-                </a:solidFill>
-                <a:latin typeface="微軟正黑體" pitchFamily="34" charset="-120"/>
-                <a:ea typeface="微軟正黑體" pitchFamily="34" charset="-120"/>
-              </a:rPr>
-              <a:t>只願</a:t>
-            </a:r>
-            <a:r>
-              <a:rPr lang="zh-TW" altLang="en-US" sz="4800" b="1" dirty="0" smtClean="0">
-                <a:solidFill>
-                  <a:srgbClr val="660033"/>
-                </a:solidFill>
-                <a:latin typeface="微軟正黑體" pitchFamily="34" charset="-120"/>
-                <a:ea typeface="微軟正黑體" pitchFamily="34" charset="-120"/>
-              </a:rPr>
-              <a:t>與</a:t>
-            </a:r>
-            <a:r>
-              <a:rPr lang="zh-CN" altLang="en-US" sz="4800" b="1" dirty="0">
-                <a:solidFill>
-                  <a:srgbClr val="660033"/>
-                </a:solidFill>
-                <a:latin typeface="微軟正黑體" pitchFamily="34" charset="-120"/>
-                <a:ea typeface="微軟正黑體" pitchFamily="34" charset="-120"/>
-              </a:rPr>
-              <a:t>袮</a:t>
-            </a:r>
-            <a:r>
-              <a:rPr lang="zh-TW" altLang="en-US" sz="4800" b="1" dirty="0" smtClean="0">
-                <a:solidFill>
-                  <a:srgbClr val="660033"/>
-                </a:solidFill>
-                <a:latin typeface="微軟正黑體" pitchFamily="34" charset="-120"/>
-                <a:ea typeface="微軟正黑體" pitchFamily="34" charset="-120"/>
-              </a:rPr>
-              <a:t>面</a:t>
-            </a:r>
-            <a:r>
-              <a:rPr lang="zh-TW" altLang="en-US" sz="4800" b="1" dirty="0">
-                <a:solidFill>
-                  <a:srgbClr val="660033"/>
-                </a:solidFill>
-                <a:latin typeface="微軟正黑體" pitchFamily="34" charset="-120"/>
-                <a:ea typeface="微軟正黑體" pitchFamily="34" charset="-120"/>
-              </a:rPr>
-              <a:t>對面</a:t>
-            </a:r>
           </a:p>
         </p:txBody>
       </p:sp>
@@ -3717,7 +3319,13 @@
   <p:cSld>
     <p:spTree>
       <p:nvGrpSpPr>
-        <p:cNvPr id="1" name=""/>
+        <p:cNvPr id="1" name="">
+          <a:extLst>
+            <a:ext uri="{FF2B5EF4-FFF2-40B4-BE49-F238E27FC236}">
+              <a16:creationId xmlns:a16="http://schemas.microsoft.com/office/drawing/2014/main" id="{847010FC-F864-0944-1E54-CA31DA7C05FE}"/>
+            </a:ext>
+          </a:extLst>
+        </p:cNvPr>
         <p:cNvGrpSpPr/>
         <p:nvPr/>
       </p:nvGrpSpPr>
@@ -3731,81 +3339,65 @@
       </p:grpSpPr>
       <p:sp>
         <p:nvSpPr>
-          <p:cNvPr id="4" name="標題 3"/>
-          <p:cNvSpPr>
-            <a:spLocks noGrp="1"/>
-          </p:cNvSpPr>
-          <p:nvPr>
-            <p:ph type="title"/>
-          </p:nvPr>
-        </p:nvSpPr>
-        <p:spPr/>
-        <p:txBody>
-          <a:bodyPr>
+          <p:cNvPr id="5" name="內容版面配置區 4">
+            <a:extLst>
+              <a:ext uri="{FF2B5EF4-FFF2-40B4-BE49-F238E27FC236}">
+                <a16:creationId xmlns:a16="http://schemas.microsoft.com/office/drawing/2014/main" id="{82801CD3-9481-AF54-76B0-AEFA9208FCCA}"/>
+              </a:ext>
+            </a:extLst>
+          </p:cNvPr>
+          <p:cNvSpPr>
+            <a:spLocks noGrp="1"/>
+          </p:cNvSpPr>
+          <p:nvPr>
+            <p:ph idx="1"/>
+          </p:nvPr>
+        </p:nvSpPr>
+        <p:spPr>
+          <a:xfrm>
+            <a:off x="0" y="1563638"/>
+            <a:ext cx="9144000" cy="1803647"/>
+          </a:xfrm>
+        </p:spPr>
+        <p:txBody>
+          <a:bodyPr anchor="ctr">
             <a:normAutofit/>
           </a:bodyPr>
           <a:lstStyle/>
           <a:p>
-            <a:r>
-              <a:rPr lang="zh-TW" altLang="en-US" sz="4000" b="1" dirty="0">
+            <a:pPr algn="ctr">
+              <a:buNone/>
+            </a:pPr>
+            <a:r>
+              <a:rPr lang="zh-CN" altLang="en-US" sz="4800" b="1" dirty="0">
                 <a:solidFill>
                   <a:srgbClr val="660033"/>
                 </a:solidFill>
                 <a:latin typeface="微軟正黑體" pitchFamily="34" charset="-120"/>
                 <a:ea typeface="微軟正黑體" pitchFamily="34" charset="-120"/>
               </a:rPr>
-              <a:t>我心切切渴</a:t>
-            </a:r>
-            <a:r>
-              <a:rPr lang="zh-TW" altLang="en-US" sz="4000" b="1" dirty="0" smtClean="0">
+              <a:t>祢</a:t>
+            </a:r>
+            <a:r>
+              <a:rPr lang="zh-TW" altLang="en-US" sz="4800" b="1" dirty="0">
                 <a:solidFill>
                   <a:srgbClr val="660033"/>
                 </a:solidFill>
                 <a:latin typeface="微軟正黑體" pitchFamily="34" charset="-120"/>
                 <a:ea typeface="微軟正黑體" pitchFamily="34" charset="-120"/>
               </a:rPr>
-              <a:t>慕</a:t>
-            </a:r>
-            <a:r>
-              <a:rPr lang="zh-CN" altLang="en-US" sz="4000" b="1" dirty="0">
+              <a:t>是我一切</a:t>
+            </a:r>
+            <a:r>
+              <a:rPr lang="en-US" altLang="zh-TW" sz="4800" b="1" dirty="0">
                 <a:solidFill>
                   <a:srgbClr val="660033"/>
                 </a:solidFill>
                 <a:latin typeface="微軟正黑體" pitchFamily="34" charset="-120"/>
                 <a:ea typeface="微軟正黑體" pitchFamily="34" charset="-120"/>
               </a:rPr>
-              <a:t>袮</a:t>
-            </a:r>
-            <a:endParaRPr lang="zh-TW" altLang="en-US" sz="4000" b="1" dirty="0">
-              <a:solidFill>
-                <a:srgbClr val="660033"/>
-              </a:solidFill>
-              <a:latin typeface="微軟正黑體" pitchFamily="34" charset="-120"/>
-              <a:ea typeface="微軟正黑體" pitchFamily="34" charset="-120"/>
-            </a:endParaRPr>
-          </a:p>
-        </p:txBody>
-      </p:sp>
-      <p:sp>
-        <p:nvSpPr>
-          <p:cNvPr id="5" name="內容版面配置區 4"/>
-          <p:cNvSpPr>
-            <a:spLocks noGrp="1"/>
-          </p:cNvSpPr>
-          <p:nvPr>
-            <p:ph idx="1"/>
-          </p:nvPr>
-        </p:nvSpPr>
-        <p:spPr/>
-        <p:txBody>
-          <a:bodyPr>
-            <a:noAutofit/>
-          </a:bodyPr>
-          <a:lstStyle/>
-          <a:p>
-            <a:pPr algn="ctr">
-              <a:buNone/>
-            </a:pPr>
+              <a:t>  </a:t>
+            </a:r>
             <a:r>
               <a:rPr lang="zh-TW" altLang="en-US" sz="4800" b="1" dirty="0">
                 <a:solidFill>
@@ -3814,27 +3406,17 @@
                 <a:latin typeface="微軟正黑體" pitchFamily="34" charset="-120"/>
                 <a:ea typeface="微軟正黑體" pitchFamily="34" charset="-120"/>
               </a:rPr>
-              <a:t>我要永永遠遠來</a:t>
-            </a:r>
-            <a:r>
-              <a:rPr lang="zh-TW" altLang="en-US" sz="4800" b="1" dirty="0" smtClean="0">
+              <a:t>我心完全屬於</a:t>
+            </a:r>
+            <a:r>
+              <a:rPr lang="zh-CN" altLang="en-US" sz="4800" b="1" dirty="0">
                 <a:solidFill>
                   <a:srgbClr val="660033"/>
                 </a:solidFill>
                 <a:latin typeface="微軟正黑體" pitchFamily="34" charset="-120"/>
                 <a:ea typeface="微軟正黑體" pitchFamily="34" charset="-120"/>
               </a:rPr>
-              <a:t>愛</a:t>
-            </a:r>
-            <a:r>
-              <a:rPr lang="zh-CN" altLang="en-US" sz="4800" b="1" dirty="0">
-                <a:solidFill>
-                  <a:srgbClr val="660033"/>
-                </a:solidFill>
-                <a:latin typeface="微軟正黑體" pitchFamily="34" charset="-120"/>
-                <a:ea typeface="微軟正黑體" pitchFamily="34" charset="-120"/>
-              </a:rPr>
-              <a:t>袮</a:t>
+              <a:t>祢</a:t>
             </a:r>
             <a:endParaRPr lang="en-US" altLang="zh-TW" sz="4800" b="1" dirty="0">
               <a:solidFill>
@@ -3856,196 +3438,95 @@
                 <a:latin typeface="微軟正黑體" pitchFamily="34" charset="-120"/>
                 <a:ea typeface="微軟正黑體" pitchFamily="34" charset="-120"/>
               </a:rPr>
-              <a:t>我要永永遠遠渴</a:t>
-            </a:r>
-            <a:r>
-              <a:rPr lang="zh-TW" altLang="en-US" sz="4800" b="1" dirty="0" smtClean="0">
-                <a:solidFill>
-                  <a:srgbClr val="660033"/>
-                </a:solidFill>
-                <a:latin typeface="微軟正黑體" pitchFamily="34" charset="-120"/>
-                <a:ea typeface="微軟正黑體" pitchFamily="34" charset="-120"/>
-              </a:rPr>
-              <a:t>慕</a:t>
-            </a:r>
-            <a:r>
-              <a:rPr lang="zh-CN" altLang="en-US" sz="4800" b="1" dirty="0">
-                <a:solidFill>
-                  <a:srgbClr val="660033"/>
-                </a:solidFill>
-                <a:latin typeface="微軟正黑體" pitchFamily="34" charset="-120"/>
-                <a:ea typeface="微軟正黑體" pitchFamily="34" charset="-120"/>
-              </a:rPr>
-              <a:t>袮</a:t>
-            </a:r>
-            <a:endParaRPr lang="en-US" altLang="zh-TW" sz="4800" b="1" dirty="0">
+              <a:t>只願更多與祢相親</a:t>
+            </a:r>
+          </a:p>
+        </p:txBody>
+      </p:sp>
+      <p:sp>
+        <p:nvSpPr>
+          <p:cNvPr id="3" name="TextBox 2">
+            <a:extLst>
+              <a:ext uri="{FF2B5EF4-FFF2-40B4-BE49-F238E27FC236}">
+                <a16:creationId xmlns:a16="http://schemas.microsoft.com/office/drawing/2014/main" id="{B71A98A5-7195-DD84-ABCA-910E92893C42}"/>
+              </a:ext>
+            </a:extLst>
+          </p:cNvPr>
+          <p:cNvSpPr txBox="1"/>
+          <p:nvPr/>
+        </p:nvSpPr>
+        <p:spPr>
+          <a:xfrm>
+            <a:off x="0" y="3867894"/>
+            <a:ext cx="9144000" cy="461665"/>
+          </a:xfrm>
+          <a:prstGeom prst="rect">
+            <a:avLst/>
+          </a:prstGeom>
+          <a:noFill/>
+        </p:spPr>
+        <p:txBody>
+          <a:bodyPr wrap="square" rtlCol="0">
+            <a:spAutoFit/>
+          </a:bodyPr>
+          <a:lstStyle/>
+          <a:p>
+            <a:pPr algn="ctr"/>
+            <a:r>
+              <a:rPr lang="en-US" sz="2400" b="1" dirty="0">
+                <a:solidFill>
+                  <a:srgbClr val="660033"/>
+                </a:solidFill>
+                <a:latin typeface="Microsoft JhengHei" panose="020B0604030504040204" pitchFamily="34" charset="-120"/>
+                <a:ea typeface="Microsoft JhengHei" panose="020B0604030504040204" pitchFamily="34" charset="-120"/>
+              </a:rPr>
+              <a:t>( </a:t>
+            </a:r>
+            <a:r>
+              <a:rPr lang="zh-CN" altLang="en-US" sz="2400" b="1">
+                <a:solidFill>
+                  <a:srgbClr val="660033"/>
+                </a:solidFill>
+                <a:latin typeface="Microsoft JhengHei" panose="020B0604030504040204" pitchFamily="34" charset="-120"/>
+                <a:ea typeface="Microsoft JhengHei" panose="020B0604030504040204" pitchFamily="34" charset="-120"/>
+              </a:rPr>
+              <a:t>正歌</a:t>
+            </a:r>
+            <a:r>
+              <a:rPr lang="en-US" sz="2400" b="1">
+                <a:solidFill>
+                  <a:srgbClr val="660033"/>
+                </a:solidFill>
+                <a:latin typeface="Microsoft JhengHei" panose="020B0604030504040204" pitchFamily="34" charset="-120"/>
+                <a:ea typeface="Microsoft JhengHei" panose="020B0604030504040204" pitchFamily="34" charset="-120"/>
+              </a:rPr>
+              <a:t> </a:t>
+            </a:r>
+            <a:r>
+              <a:rPr lang="en-US" sz="2400" b="1" dirty="0">
+                <a:solidFill>
+                  <a:srgbClr val="660033"/>
+                </a:solidFill>
+                <a:latin typeface="Microsoft JhengHei" panose="020B0604030504040204" pitchFamily="34" charset="-120"/>
+                <a:ea typeface="Microsoft JhengHei" panose="020B0604030504040204" pitchFamily="34" charset="-120"/>
+              </a:rPr>
+              <a:t>)</a:t>
+            </a:r>
+            <a:endParaRPr lang="vi-VN" sz="2400" b="1" dirty="0">
               <a:solidFill>
                 <a:srgbClr val="660033"/>
               </a:solidFill>
-              <a:latin typeface="微軟正黑體" pitchFamily="34" charset="-120"/>
-              <a:ea typeface="微軟正黑體" pitchFamily="34" charset="-120"/>
+              <a:ea typeface="Microsoft JhengHei" panose="020B0604030504040204" pitchFamily="34" charset="-120"/>
             </a:endParaRPr>
           </a:p>
-          <a:p>
-            <a:pPr algn="ctr">
-              <a:buNone/>
-            </a:pPr>
-            <a:r>
-              <a:rPr lang="zh-CN" altLang="en-US" sz="4800" b="1" dirty="0">
-                <a:solidFill>
-                  <a:srgbClr val="660033"/>
-                </a:solidFill>
-                <a:latin typeface="微軟正黑體" pitchFamily="34" charset="-120"/>
-                <a:ea typeface="微軟正黑體" pitchFamily="34" charset="-120"/>
-              </a:rPr>
-              <a:t>袮</a:t>
-            </a:r>
-            <a:r>
-              <a:rPr lang="zh-TW" altLang="en-US" sz="4800" b="1" dirty="0" smtClean="0">
-                <a:solidFill>
-                  <a:srgbClr val="660033"/>
-                </a:solidFill>
-                <a:latin typeface="微軟正黑體" pitchFamily="34" charset="-120"/>
-                <a:ea typeface="微軟正黑體" pitchFamily="34" charset="-120"/>
-              </a:rPr>
-              <a:t>是</a:t>
-            </a:r>
-            <a:r>
-              <a:rPr lang="zh-TW" altLang="en-US" sz="4800" b="1" dirty="0">
-                <a:solidFill>
-                  <a:srgbClr val="660033"/>
-                </a:solidFill>
-                <a:latin typeface="微軟正黑體" pitchFamily="34" charset="-120"/>
-                <a:ea typeface="微軟正黑體" pitchFamily="34" charset="-120"/>
-              </a:rPr>
-              <a:t>我一</a:t>
-            </a:r>
-            <a:r>
-              <a:rPr lang="zh-TW" altLang="en-US" sz="4800" b="1" dirty="0" smtClean="0">
-                <a:solidFill>
-                  <a:srgbClr val="660033"/>
-                </a:solidFill>
-                <a:latin typeface="微軟正黑體" pitchFamily="34" charset="-120"/>
-                <a:ea typeface="微軟正黑體" pitchFamily="34" charset="-120"/>
-              </a:rPr>
-              <a:t>切</a:t>
-            </a:r>
-            <a:r>
-              <a:rPr lang="en-US" altLang="zh-TW" sz="4800" b="1" dirty="0" smtClean="0">
-                <a:solidFill>
-                  <a:srgbClr val="660033"/>
-                </a:solidFill>
-                <a:latin typeface="微軟正黑體" pitchFamily="34" charset="-120"/>
-                <a:ea typeface="微軟正黑體" pitchFamily="34" charset="-120"/>
-              </a:rPr>
-              <a:t>  </a:t>
-            </a:r>
-            <a:r>
-              <a:rPr lang="zh-TW" altLang="en-US" sz="4800" b="1" dirty="0" smtClean="0">
-                <a:solidFill>
-                  <a:srgbClr val="660033"/>
-                </a:solidFill>
-                <a:latin typeface="微軟正黑體" pitchFamily="34" charset="-120"/>
-                <a:ea typeface="微軟正黑體" pitchFamily="34" charset="-120"/>
-              </a:rPr>
-              <a:t>我</a:t>
-            </a:r>
-            <a:r>
-              <a:rPr lang="zh-TW" altLang="en-US" sz="4800" b="1" dirty="0">
-                <a:solidFill>
-                  <a:srgbClr val="660033"/>
-                </a:solidFill>
-                <a:latin typeface="微軟正黑體" pitchFamily="34" charset="-120"/>
-                <a:ea typeface="微軟正黑體" pitchFamily="34" charset="-120"/>
-              </a:rPr>
-              <a:t>心不住思</a:t>
-            </a:r>
-            <a:r>
-              <a:rPr lang="zh-TW" altLang="en-US" sz="4800" b="1" dirty="0" smtClean="0">
-                <a:solidFill>
-                  <a:srgbClr val="660033"/>
-                </a:solidFill>
-                <a:latin typeface="微軟正黑體" pitchFamily="34" charset="-120"/>
-                <a:ea typeface="微軟正黑體" pitchFamily="34" charset="-120"/>
-              </a:rPr>
-              <a:t>念</a:t>
-            </a:r>
-            <a:r>
-              <a:rPr lang="zh-CN" altLang="en-US" sz="4800" b="1" dirty="0">
-                <a:solidFill>
-                  <a:srgbClr val="660033"/>
-                </a:solidFill>
-                <a:latin typeface="微軟正黑體" pitchFamily="34" charset="-120"/>
-                <a:ea typeface="微軟正黑體" pitchFamily="34" charset="-120"/>
-              </a:rPr>
-              <a:t>袮</a:t>
-            </a:r>
-            <a:endParaRPr lang="en-US" altLang="zh-TW" sz="4800" b="1" dirty="0">
-              <a:solidFill>
-                <a:srgbClr val="660033"/>
-              </a:solidFill>
-              <a:latin typeface="微軟正黑體" pitchFamily="34" charset="-120"/>
-              <a:ea typeface="微軟正黑體" pitchFamily="34" charset="-120"/>
-            </a:endParaRPr>
-          </a:p>
-          <a:p>
-            <a:pPr algn="ctr">
-              <a:buNone/>
-            </a:pPr>
-            <a:r>
-              <a:rPr lang="zh-TW" altLang="en-US" sz="4800" b="1" dirty="0">
-                <a:solidFill>
-                  <a:srgbClr val="660033"/>
-                </a:solidFill>
-                <a:latin typeface="微軟正黑體" pitchFamily="34" charset="-120"/>
-                <a:ea typeface="微軟正黑體" pitchFamily="34" charset="-120"/>
-              </a:rPr>
-              <a:t>只願</a:t>
-            </a:r>
-            <a:r>
-              <a:rPr lang="zh-TW" altLang="en-US" sz="4800" b="1" dirty="0" smtClean="0">
-                <a:solidFill>
-                  <a:srgbClr val="660033"/>
-                </a:solidFill>
-                <a:latin typeface="微軟正黑體" pitchFamily="34" charset="-120"/>
-                <a:ea typeface="微軟正黑體" pitchFamily="34" charset="-120"/>
-              </a:rPr>
-              <a:t>與</a:t>
-            </a:r>
-            <a:r>
-              <a:rPr lang="zh-CN" altLang="en-US" sz="4800" b="1" dirty="0">
-                <a:solidFill>
-                  <a:srgbClr val="660033"/>
-                </a:solidFill>
-                <a:latin typeface="微軟正黑體" pitchFamily="34" charset="-120"/>
-                <a:ea typeface="微軟正黑體" pitchFamily="34" charset="-120"/>
-              </a:rPr>
-              <a:t>袮</a:t>
-            </a:r>
-            <a:r>
-              <a:rPr lang="zh-TW" altLang="en-US" sz="4800" b="1" dirty="0" smtClean="0">
-                <a:solidFill>
-                  <a:srgbClr val="660033"/>
-                </a:solidFill>
-                <a:latin typeface="微軟正黑體" pitchFamily="34" charset="-120"/>
-                <a:ea typeface="微軟正黑體" pitchFamily="34" charset="-120"/>
-              </a:rPr>
-              <a:t>面</a:t>
-            </a:r>
-            <a:r>
-              <a:rPr lang="zh-TW" altLang="en-US" sz="4800" b="1" dirty="0">
-                <a:solidFill>
-                  <a:srgbClr val="660033"/>
-                </a:solidFill>
-                <a:latin typeface="微軟正黑體" pitchFamily="34" charset="-120"/>
-                <a:ea typeface="微軟正黑體" pitchFamily="34" charset="-120"/>
-              </a:rPr>
-              <a:t>對面</a:t>
-            </a:r>
-          </a:p>
         </p:txBody>
       </p:sp>
     </p:spTree>
+    <p:extLst>
+      <p:ext uri="{BB962C8B-B14F-4D97-AF65-F5344CB8AC3E}">
+        <p14:creationId xmlns:p14="http://schemas.microsoft.com/office/powerpoint/2010/main" val="246025205"/>
+      </p:ext>
+    </p:extLst>
   </p:cSld>
   <p:clrMapOvr>
     <a:masterClrMapping/>
@@ -4058,7 +3539,13 @@
   <p:cSld>
     <p:spTree>
       <p:nvGrpSpPr>
-        <p:cNvPr id="1" name=""/>
+        <p:cNvPr id="1" name="">
+          <a:extLst>
+            <a:ext uri="{FF2B5EF4-FFF2-40B4-BE49-F238E27FC236}">
+              <a16:creationId xmlns:a16="http://schemas.microsoft.com/office/drawing/2014/main" id="{4BCE89C2-717F-8EF8-C5EC-675BD3755656}"/>
+            </a:ext>
+          </a:extLst>
+        </p:cNvPr>
         <p:cNvGrpSpPr/>
         <p:nvPr/>
       </p:nvGrpSpPr>
@@ -4072,110 +3559,54 @@
       </p:grpSpPr>
       <p:sp>
         <p:nvSpPr>
-          <p:cNvPr id="4" name="標題 3"/>
-          <p:cNvSpPr>
-            <a:spLocks noGrp="1"/>
-          </p:cNvSpPr>
-          <p:nvPr>
-            <p:ph type="title"/>
-          </p:nvPr>
-        </p:nvSpPr>
-        <p:spPr/>
-        <p:txBody>
-          <a:bodyPr>
+          <p:cNvPr id="5" name="內容版面配置區 4">
+            <a:extLst>
+              <a:ext uri="{FF2B5EF4-FFF2-40B4-BE49-F238E27FC236}">
+                <a16:creationId xmlns:a16="http://schemas.microsoft.com/office/drawing/2014/main" id="{DF856320-D39C-C480-01DD-34F889B25DEE}"/>
+              </a:ext>
+            </a:extLst>
+          </p:cNvPr>
+          <p:cNvSpPr>
+            <a:spLocks noGrp="1"/>
+          </p:cNvSpPr>
+          <p:nvPr>
+            <p:ph idx="1"/>
+          </p:nvPr>
+        </p:nvSpPr>
+        <p:spPr>
+          <a:xfrm>
+            <a:off x="0" y="1563638"/>
+            <a:ext cx="9144000" cy="1803647"/>
+          </a:xfrm>
+        </p:spPr>
+        <p:txBody>
+          <a:bodyPr anchor="ctr">
             <a:normAutofit/>
           </a:bodyPr>
           <a:lstStyle/>
           <a:p>
-            <a:r>
-              <a:rPr lang="zh-TW" altLang="en-US" sz="4000" b="1" dirty="0">
+            <a:pPr algn="ctr">
+              <a:buNone/>
+            </a:pPr>
+            <a:r>
+              <a:rPr lang="zh-TW" altLang="en-US" sz="4800" b="1" dirty="0">
                 <a:solidFill>
                   <a:srgbClr val="660033"/>
                 </a:solidFill>
                 <a:latin typeface="微軟正黑體" pitchFamily="34" charset="-120"/>
                 <a:ea typeface="微軟正黑體" pitchFamily="34" charset="-120"/>
               </a:rPr>
-              <a:t>我心切切渴</a:t>
-            </a:r>
-            <a:r>
-              <a:rPr lang="zh-TW" altLang="en-US" sz="4000" b="1" dirty="0" smtClean="0">
+              <a:t>我要切切尋求</a:t>
+            </a:r>
+            <a:r>
+              <a:rPr lang="zh-CN" altLang="en-US" sz="4800" b="1" dirty="0">
                 <a:solidFill>
                   <a:srgbClr val="660033"/>
                 </a:solidFill>
                 <a:latin typeface="微軟正黑體" pitchFamily="34" charset="-120"/>
                 <a:ea typeface="微軟正黑體" pitchFamily="34" charset="-120"/>
               </a:rPr>
-              <a:t>慕</a:t>
-            </a:r>
-            <a:r>
-              <a:rPr lang="zh-CN" altLang="en-US" sz="4000" b="1" dirty="0">
-                <a:solidFill>
-                  <a:srgbClr val="660033"/>
-                </a:solidFill>
-                <a:latin typeface="微軟正黑體" pitchFamily="34" charset="-120"/>
-                <a:ea typeface="微軟正黑體" pitchFamily="34" charset="-120"/>
-              </a:rPr>
-              <a:t>袮</a:t>
-            </a:r>
-            <a:endParaRPr lang="zh-TW" altLang="en-US" sz="4000" b="1" dirty="0">
-              <a:solidFill>
-                <a:srgbClr val="660033"/>
-              </a:solidFill>
-              <a:latin typeface="微軟正黑體" pitchFamily="34" charset="-120"/>
-              <a:ea typeface="微軟正黑體" pitchFamily="34" charset="-120"/>
-            </a:endParaRPr>
-          </a:p>
-        </p:txBody>
-      </p:sp>
-      <p:sp>
-        <p:nvSpPr>
-          <p:cNvPr id="5" name="內容版面配置區 4"/>
-          <p:cNvSpPr>
-            <a:spLocks noGrp="1"/>
-          </p:cNvSpPr>
-          <p:nvPr>
-            <p:ph idx="1"/>
-          </p:nvPr>
-        </p:nvSpPr>
-        <p:spPr/>
-        <p:txBody>
-          <a:bodyPr>
-            <a:noAutofit/>
-          </a:bodyPr>
-          <a:lstStyle/>
-          <a:p>
-            <a:pPr algn="ctr">
-              <a:buNone/>
-            </a:pPr>
-            <a:r>
-              <a:rPr lang="zh-CN" altLang="en-US" sz="4800" b="1" dirty="0">
-                <a:solidFill>
-                  <a:srgbClr val="660033"/>
-                </a:solidFill>
-                <a:latin typeface="微軟正黑體" pitchFamily="34" charset="-120"/>
-                <a:ea typeface="微軟正黑體" pitchFamily="34" charset="-120"/>
-              </a:rPr>
-              <a:t>袮</a:t>
-            </a:r>
-            <a:r>
-              <a:rPr lang="zh-TW" altLang="en-US" sz="4800" b="1" dirty="0" smtClean="0">
-                <a:solidFill>
-                  <a:srgbClr val="660033"/>
-                </a:solidFill>
-                <a:latin typeface="微軟正黑體" pitchFamily="34" charset="-120"/>
-                <a:ea typeface="微軟正黑體" pitchFamily="34" charset="-120"/>
-              </a:rPr>
-              <a:t>的</a:t>
-            </a:r>
-            <a:r>
-              <a:rPr lang="zh-TW" altLang="en-US" sz="4800" b="1" dirty="0">
-                <a:solidFill>
-                  <a:srgbClr val="660033"/>
-                </a:solidFill>
-                <a:latin typeface="微軟正黑體" pitchFamily="34" charset="-120"/>
-                <a:ea typeface="微軟正黑體" pitchFamily="34" charset="-120"/>
-              </a:rPr>
-              <a:t>愛最美</a:t>
+              <a:t>祢</a:t>
             </a:r>
             <a:endParaRPr lang="en-US" altLang="zh-TW" sz="4800" b="1" dirty="0">
               <a:solidFill>
@@ -4197,27 +3628,7 @@
                 <a:latin typeface="微軟正黑體" pitchFamily="34" charset="-120"/>
                 <a:ea typeface="微軟正黑體" pitchFamily="34" charset="-120"/>
               </a:rPr>
-              <a:t>我心不住思</a:t>
-            </a:r>
-            <a:r>
-              <a:rPr lang="zh-TW" altLang="en-US" sz="4800" b="1" dirty="0" smtClean="0">
-                <a:solidFill>
-                  <a:srgbClr val="660033"/>
-                </a:solidFill>
-                <a:latin typeface="微軟正黑體" pitchFamily="34" charset="-120"/>
-                <a:ea typeface="微軟正黑體" pitchFamily="34" charset="-120"/>
-              </a:rPr>
-              <a:t>念</a:t>
-            </a:r>
-            <a:r>
-              <a:rPr lang="zh-CN" altLang="en-US" sz="4800" b="1" dirty="0">
-                <a:solidFill>
-                  <a:srgbClr val="660033"/>
-                </a:solidFill>
-                <a:latin typeface="微軟正黑體" pitchFamily="34" charset="-120"/>
-                <a:ea typeface="微軟正黑體" pitchFamily="34" charset="-120"/>
-              </a:rPr>
-              <a:t>袮</a:t>
+              <a:t>乾旱疲乏無水之地</a:t>
             </a:r>
             <a:endParaRPr lang="en-US" altLang="zh-TW" sz="4800" b="1" dirty="0">
               <a:solidFill>
@@ -4227,64 +3638,969 @@
               <a:ea typeface="微軟正黑體" pitchFamily="34" charset="-120"/>
             </a:endParaRPr>
           </a:p>
+        </p:txBody>
+      </p:sp>
+      <p:sp>
+        <p:nvSpPr>
+          <p:cNvPr id="3" name="TextBox 2">
+            <a:extLst>
+              <a:ext uri="{FF2B5EF4-FFF2-40B4-BE49-F238E27FC236}">
+                <a16:creationId xmlns:a16="http://schemas.microsoft.com/office/drawing/2014/main" id="{01620FF2-D3E5-F569-5BBD-0773699F3B68}"/>
+              </a:ext>
+            </a:extLst>
+          </p:cNvPr>
+          <p:cNvSpPr txBox="1"/>
+          <p:nvPr/>
+        </p:nvSpPr>
+        <p:spPr>
+          <a:xfrm>
+            <a:off x="0" y="3867894"/>
+            <a:ext cx="9144000" cy="461665"/>
+          </a:xfrm>
+          <a:prstGeom prst="rect">
+            <a:avLst/>
+          </a:prstGeom>
+          <a:noFill/>
+        </p:spPr>
+        <p:txBody>
+          <a:bodyPr wrap="square" rtlCol="0">
+            <a:spAutoFit/>
+          </a:bodyPr>
+          <a:lstStyle/>
+          <a:p>
+            <a:pPr algn="ctr"/>
+            <a:r>
+              <a:rPr lang="en-US" sz="2400" b="1" dirty="0">
+                <a:solidFill>
+                  <a:srgbClr val="660033"/>
+                </a:solidFill>
+                <a:latin typeface="Microsoft JhengHei" panose="020B0604030504040204" pitchFamily="34" charset="-120"/>
+                <a:ea typeface="Microsoft JhengHei" panose="020B0604030504040204" pitchFamily="34" charset="-120"/>
+              </a:rPr>
+              <a:t>( </a:t>
+            </a:r>
+            <a:r>
+              <a:rPr lang="zh-CN" altLang="en-US" sz="2400" b="1">
+                <a:solidFill>
+                  <a:srgbClr val="660033"/>
+                </a:solidFill>
+                <a:latin typeface="Microsoft JhengHei" panose="020B0604030504040204" pitchFamily="34" charset="-120"/>
+                <a:ea typeface="Microsoft JhengHei" panose="020B0604030504040204" pitchFamily="34" charset="-120"/>
+              </a:rPr>
+              <a:t>正歌</a:t>
+            </a:r>
+            <a:r>
+              <a:rPr lang="en-US" sz="2400" b="1">
+                <a:solidFill>
+                  <a:srgbClr val="660033"/>
+                </a:solidFill>
+                <a:latin typeface="Microsoft JhengHei" panose="020B0604030504040204" pitchFamily="34" charset="-120"/>
+                <a:ea typeface="Microsoft JhengHei" panose="020B0604030504040204" pitchFamily="34" charset="-120"/>
+              </a:rPr>
+              <a:t> </a:t>
+            </a:r>
+            <a:r>
+              <a:rPr lang="en-US" sz="2400" b="1" dirty="0">
+                <a:solidFill>
+                  <a:srgbClr val="660033"/>
+                </a:solidFill>
+                <a:latin typeface="Microsoft JhengHei" panose="020B0604030504040204" pitchFamily="34" charset="-120"/>
+                <a:ea typeface="Microsoft JhengHei" panose="020B0604030504040204" pitchFamily="34" charset="-120"/>
+              </a:rPr>
+              <a:t>)</a:t>
+            </a:r>
+            <a:endParaRPr lang="vi-VN" sz="2400" b="1" dirty="0">
+              <a:solidFill>
+                <a:srgbClr val="660033"/>
+              </a:solidFill>
+              <a:ea typeface="Microsoft JhengHei" panose="020B0604030504040204" pitchFamily="34" charset="-120"/>
+            </a:endParaRPr>
+          </a:p>
+        </p:txBody>
+      </p:sp>
+    </p:spTree>
+    <p:extLst>
+      <p:ext uri="{BB962C8B-B14F-4D97-AF65-F5344CB8AC3E}">
+        <p14:creationId xmlns:p14="http://schemas.microsoft.com/office/powerpoint/2010/main" val="390259860"/>
+      </p:ext>
+    </p:extLst>
+  </p:cSld>
+  <p:clrMapOvr>
+    <a:masterClrMapping/>
+  </p:clrMapOvr>
+</p:sld>
+</file>
+
+<file path=ppt/slides/slide5.xml><?xml version="1.0" encoding="utf-8"?>
+<p:sld xmlns:a="http://schemas.openxmlformats.org/drawingml/2006/main" xmlns:r="http://schemas.openxmlformats.org/officeDocument/2006/relationships" xmlns:p="http://schemas.openxmlformats.org/presentationml/2006/main">
+  <p:cSld>
+    <p:spTree>
+      <p:nvGrpSpPr>
+        <p:cNvPr id="1" name="">
+          <a:extLst>
+            <a:ext uri="{FF2B5EF4-FFF2-40B4-BE49-F238E27FC236}">
+              <a16:creationId xmlns:a16="http://schemas.microsoft.com/office/drawing/2014/main" id="{77C924E0-21E0-0C07-1D82-C1FBDC1BD881}"/>
+            </a:ext>
+          </a:extLst>
+        </p:cNvPr>
+        <p:cNvGrpSpPr/>
+        <p:nvPr/>
+      </p:nvGrpSpPr>
+      <p:grpSpPr>
+        <a:xfrm>
+          <a:off x="0" y="0"/>
+          <a:ext cx="0" cy="0"/>
+          <a:chOff x="0" y="0"/>
+          <a:chExt cx="0" cy="0"/>
+        </a:xfrm>
+      </p:grpSpPr>
+      <p:sp>
+        <p:nvSpPr>
+          <p:cNvPr id="5" name="內容版面配置區 4">
+            <a:extLst>
+              <a:ext uri="{FF2B5EF4-FFF2-40B4-BE49-F238E27FC236}">
+                <a16:creationId xmlns:a16="http://schemas.microsoft.com/office/drawing/2014/main" id="{B9F2F6A9-ED73-A163-E248-C6339B278DDD}"/>
+              </a:ext>
+            </a:extLst>
+          </p:cNvPr>
+          <p:cNvSpPr>
+            <a:spLocks noGrp="1"/>
+          </p:cNvSpPr>
+          <p:nvPr>
+            <p:ph idx="1"/>
+          </p:nvPr>
+        </p:nvSpPr>
+        <p:spPr>
+          <a:xfrm>
+            <a:off x="0" y="1563638"/>
+            <a:ext cx="9144000" cy="1803647"/>
+          </a:xfrm>
+        </p:spPr>
+        <p:txBody>
+          <a:bodyPr anchor="ctr">
+            <a:normAutofit/>
+          </a:bodyPr>
+          <a:lstStyle/>
           <a:p>
             <a:pPr algn="ctr">
               <a:buNone/>
             </a:pPr>
             <a:r>
-              <a:rPr lang="zh-TW" altLang="en-US" sz="4800" b="1" dirty="0">
+              <a:rPr lang="zh-CN" altLang="en-US" sz="4800" b="1" dirty="0">
                 <a:solidFill>
                   <a:srgbClr val="660033"/>
                 </a:solidFill>
                 <a:latin typeface="微軟正黑體" pitchFamily="34" charset="-120"/>
                 <a:ea typeface="微軟正黑體" pitchFamily="34" charset="-120"/>
               </a:rPr>
-              <a:t>只願</a:t>
-            </a:r>
-            <a:r>
-              <a:rPr lang="zh-TW" altLang="en-US" sz="4800" b="1" dirty="0" smtClean="0">
+              <a:t>祢</a:t>
+            </a:r>
+            <a:r>
+              <a:rPr lang="zh-TW" altLang="en-US" sz="4800" b="1" dirty="0">
                 <a:solidFill>
                   <a:srgbClr val="660033"/>
                 </a:solidFill>
                 <a:latin typeface="微軟正黑體" pitchFamily="34" charset="-120"/>
                 <a:ea typeface="微軟正黑體" pitchFamily="34" charset="-120"/>
               </a:rPr>
-              <a:t>與</a:t>
-            </a:r>
-            <a:r>
-              <a:rPr lang="zh-CN" altLang="en-US" sz="4800" b="1" dirty="0">
+              <a:t>是我一切</a:t>
+            </a:r>
+            <a:r>
+              <a:rPr lang="en-US" altLang="zh-TW" sz="4800" b="1" dirty="0">
                 <a:solidFill>
                   <a:srgbClr val="660033"/>
                 </a:solidFill>
                 <a:latin typeface="微軟正黑體" pitchFamily="34" charset="-120"/>
                 <a:ea typeface="微軟正黑體" pitchFamily="34" charset="-120"/>
               </a:rPr>
-              <a:t>袮</a:t>
-            </a:r>
-            <a:r>
-              <a:rPr lang="zh-TW" altLang="en-US" sz="4800" b="1" dirty="0" smtClean="0">
+              <a:t>  </a:t>
+            </a:r>
+            <a:r>
+              <a:rPr lang="zh-TW" altLang="en-US" sz="4800" b="1" dirty="0">
                 <a:solidFill>
                   <a:srgbClr val="660033"/>
                 </a:solidFill>
                 <a:latin typeface="微軟正黑體" pitchFamily="34" charset="-120"/>
                 <a:ea typeface="微軟正黑體" pitchFamily="34" charset="-120"/>
               </a:rPr>
-              <a:t>面</a:t>
-            </a:r>
-            <a:r>
-              <a:rPr lang="zh-TW" altLang="en-US" sz="4800" b="1" dirty="0">
+              <a:t>我心不住思念</a:t>
+            </a:r>
+            <a:r>
+              <a:rPr lang="zh-CN" altLang="en-US" sz="4800" b="1" dirty="0">
                 <a:solidFill>
                   <a:srgbClr val="660033"/>
                 </a:solidFill>
                 <a:latin typeface="微軟正黑體" pitchFamily="34" charset="-120"/>
                 <a:ea typeface="微軟正黑體" pitchFamily="34" charset="-120"/>
               </a:rPr>
-              <a:t>對面</a:t>
-            </a:r>
+              <a:t>祢</a:t>
+            </a:r>
+            <a:endParaRPr lang="en-US" altLang="zh-TW" sz="4800" b="1" dirty="0">
+              <a:solidFill>
+                <a:srgbClr val="660033"/>
+              </a:solidFill>
+              <a:latin typeface="微軟正黑體" pitchFamily="34" charset="-120"/>
+              <a:ea typeface="微軟正黑體" pitchFamily="34" charset="-120"/>
+            </a:endParaRPr>
+          </a:p>
+          <a:p>
+            <a:pPr algn="ctr">
+              <a:buNone/>
+            </a:pPr>
+            <a:r>
+              <a:rPr lang="zh-TW" altLang="en-US" sz="4800" b="1" dirty="0">
+                <a:solidFill>
+                  <a:srgbClr val="660033"/>
+                </a:solidFill>
+                <a:latin typeface="微軟正黑體" pitchFamily="34" charset="-120"/>
+                <a:ea typeface="微軟正黑體" pitchFamily="34" charset="-120"/>
+              </a:rPr>
+              <a:t>只願與</a:t>
+            </a:r>
+            <a:r>
+              <a:rPr lang="zh-CN" altLang="en-US" sz="4800" b="1" dirty="0">
+                <a:solidFill>
+                  <a:srgbClr val="660033"/>
+                </a:solidFill>
+                <a:latin typeface="微軟正黑體" pitchFamily="34" charset="-120"/>
+                <a:ea typeface="微軟正黑體" pitchFamily="34" charset="-120"/>
+              </a:rPr>
+              <a:t>祢</a:t>
+            </a:r>
+            <a:r>
+              <a:rPr lang="zh-TW" altLang="en-US" sz="4800" b="1" dirty="0">
+                <a:solidFill>
+                  <a:srgbClr val="660033"/>
+                </a:solidFill>
+                <a:latin typeface="微軟正黑體" pitchFamily="34" charset="-120"/>
+                <a:ea typeface="微軟正黑體" pitchFamily="34" charset="-120"/>
+              </a:rPr>
+              <a:t>面對面</a:t>
+            </a:r>
+          </a:p>
+        </p:txBody>
+      </p:sp>
+      <p:sp>
+        <p:nvSpPr>
+          <p:cNvPr id="3" name="TextBox 2">
+            <a:extLst>
+              <a:ext uri="{FF2B5EF4-FFF2-40B4-BE49-F238E27FC236}">
+                <a16:creationId xmlns:a16="http://schemas.microsoft.com/office/drawing/2014/main" id="{E22B2091-155D-1CF8-9EE3-E4CB57A84FFF}"/>
+              </a:ext>
+            </a:extLst>
+          </p:cNvPr>
+          <p:cNvSpPr txBox="1"/>
+          <p:nvPr/>
+        </p:nvSpPr>
+        <p:spPr>
+          <a:xfrm>
+            <a:off x="0" y="3867894"/>
+            <a:ext cx="9144000" cy="461665"/>
+          </a:xfrm>
+          <a:prstGeom prst="rect">
+            <a:avLst/>
+          </a:prstGeom>
+          <a:noFill/>
+        </p:spPr>
+        <p:txBody>
+          <a:bodyPr wrap="square" rtlCol="0">
+            <a:spAutoFit/>
+          </a:bodyPr>
+          <a:lstStyle/>
+          <a:p>
+            <a:pPr algn="ctr"/>
+            <a:r>
+              <a:rPr lang="en-US" sz="2400" b="1" dirty="0">
+                <a:solidFill>
+                  <a:srgbClr val="660033"/>
+                </a:solidFill>
+                <a:latin typeface="Microsoft JhengHei" panose="020B0604030504040204" pitchFamily="34" charset="-120"/>
+                <a:ea typeface="Microsoft JhengHei" panose="020B0604030504040204" pitchFamily="34" charset="-120"/>
+              </a:rPr>
+              <a:t>( </a:t>
+            </a:r>
+            <a:r>
+              <a:rPr lang="zh-CN" altLang="en-US" sz="2400" b="1">
+                <a:solidFill>
+                  <a:srgbClr val="660033"/>
+                </a:solidFill>
+                <a:latin typeface="Microsoft JhengHei" panose="020B0604030504040204" pitchFamily="34" charset="-120"/>
+                <a:ea typeface="Microsoft JhengHei" panose="020B0604030504040204" pitchFamily="34" charset="-120"/>
+              </a:rPr>
+              <a:t>正歌</a:t>
+            </a:r>
+            <a:r>
+              <a:rPr lang="en-US" sz="2400" b="1">
+                <a:solidFill>
+                  <a:srgbClr val="660033"/>
+                </a:solidFill>
+                <a:latin typeface="Microsoft JhengHei" panose="020B0604030504040204" pitchFamily="34" charset="-120"/>
+                <a:ea typeface="Microsoft JhengHei" panose="020B0604030504040204" pitchFamily="34" charset="-120"/>
+              </a:rPr>
+              <a:t> </a:t>
+            </a:r>
+            <a:r>
+              <a:rPr lang="en-US" sz="2400" b="1" dirty="0">
+                <a:solidFill>
+                  <a:srgbClr val="660033"/>
+                </a:solidFill>
+                <a:latin typeface="Microsoft JhengHei" panose="020B0604030504040204" pitchFamily="34" charset="-120"/>
+                <a:ea typeface="Microsoft JhengHei" panose="020B0604030504040204" pitchFamily="34" charset="-120"/>
+              </a:rPr>
+              <a:t>)</a:t>
+            </a:r>
+            <a:endParaRPr lang="vi-VN" sz="2400" b="1" dirty="0">
+              <a:solidFill>
+                <a:srgbClr val="660033"/>
+              </a:solidFill>
+              <a:ea typeface="Microsoft JhengHei" panose="020B0604030504040204" pitchFamily="34" charset="-120"/>
+            </a:endParaRPr>
           </a:p>
         </p:txBody>
       </p:sp>
     </p:spTree>
+    <p:extLst>
+      <p:ext uri="{BB962C8B-B14F-4D97-AF65-F5344CB8AC3E}">
+        <p14:creationId xmlns:p14="http://schemas.microsoft.com/office/powerpoint/2010/main" val="2036692572"/>
+      </p:ext>
+    </p:extLst>
+  </p:cSld>
+  <p:clrMapOvr>
+    <a:masterClrMapping/>
+  </p:clrMapOvr>
+</p:sld>
+</file>
+
+<file path=ppt/slides/slide6.xml><?xml version="1.0" encoding="utf-8"?>
+<p:sld xmlns:a="http://schemas.openxmlformats.org/drawingml/2006/main" xmlns:r="http://schemas.openxmlformats.org/officeDocument/2006/relationships" xmlns:p="http://schemas.openxmlformats.org/presentationml/2006/main">
+  <p:cSld>
+    <p:spTree>
+      <p:nvGrpSpPr>
+        <p:cNvPr id="1" name="">
+          <a:extLst>
+            <a:ext uri="{FF2B5EF4-FFF2-40B4-BE49-F238E27FC236}">
+              <a16:creationId xmlns:a16="http://schemas.microsoft.com/office/drawing/2014/main" id="{F9C75806-57DD-E71B-4D21-8DC926BB857C}"/>
+            </a:ext>
+          </a:extLst>
+        </p:cNvPr>
+        <p:cNvGrpSpPr/>
+        <p:nvPr/>
+      </p:nvGrpSpPr>
+      <p:grpSpPr>
+        <a:xfrm>
+          <a:off x="0" y="0"/>
+          <a:ext cx="0" cy="0"/>
+          <a:chOff x="0" y="0"/>
+          <a:chExt cx="0" cy="0"/>
+        </a:xfrm>
+      </p:grpSpPr>
+      <p:sp>
+        <p:nvSpPr>
+          <p:cNvPr id="5" name="內容版面配置區 4">
+            <a:extLst>
+              <a:ext uri="{FF2B5EF4-FFF2-40B4-BE49-F238E27FC236}">
+                <a16:creationId xmlns:a16="http://schemas.microsoft.com/office/drawing/2014/main" id="{2A180513-AD52-0B4D-30B1-13E2D27EC0D1}"/>
+              </a:ext>
+            </a:extLst>
+          </p:cNvPr>
+          <p:cNvSpPr>
+            <a:spLocks noGrp="1"/>
+          </p:cNvSpPr>
+          <p:nvPr>
+            <p:ph idx="1"/>
+          </p:nvPr>
+        </p:nvSpPr>
+        <p:spPr>
+          <a:xfrm>
+            <a:off x="0" y="1563638"/>
+            <a:ext cx="9144000" cy="1803647"/>
+          </a:xfrm>
+        </p:spPr>
+        <p:txBody>
+          <a:bodyPr anchor="ctr">
+            <a:normAutofit/>
+          </a:bodyPr>
+          <a:lstStyle/>
+          <a:p>
+            <a:pPr algn="ctr">
+              <a:buNone/>
+            </a:pPr>
+            <a:r>
+              <a:rPr lang="zh-TW" altLang="en-US" sz="4800" b="1" dirty="0">
+                <a:solidFill>
+                  <a:srgbClr val="660033"/>
+                </a:solidFill>
+                <a:latin typeface="微軟正黑體" pitchFamily="34" charset="-120"/>
+                <a:ea typeface="微軟正黑體" pitchFamily="34" charset="-120"/>
+              </a:rPr>
+              <a:t>我要永永遠遠來愛</a:t>
+            </a:r>
+            <a:r>
+              <a:rPr lang="zh-CN" altLang="en-US" sz="4800" b="1" dirty="0">
+                <a:solidFill>
+                  <a:srgbClr val="660033"/>
+                </a:solidFill>
+                <a:latin typeface="微軟正黑體" pitchFamily="34" charset="-120"/>
+                <a:ea typeface="微軟正黑體" pitchFamily="34" charset="-120"/>
+              </a:rPr>
+              <a:t>祢</a:t>
+            </a:r>
+            <a:endParaRPr lang="en-US" altLang="zh-TW" sz="4800" b="1" dirty="0">
+              <a:solidFill>
+                <a:srgbClr val="660033"/>
+              </a:solidFill>
+              <a:latin typeface="微軟正黑體" pitchFamily="34" charset="-120"/>
+              <a:ea typeface="微軟正黑體" pitchFamily="34" charset="-120"/>
+            </a:endParaRPr>
+          </a:p>
+          <a:p>
+            <a:pPr algn="ctr">
+              <a:buNone/>
+            </a:pPr>
+            <a:r>
+              <a:rPr lang="zh-TW" altLang="en-US" sz="4800" b="1" dirty="0">
+                <a:solidFill>
+                  <a:srgbClr val="660033"/>
+                </a:solidFill>
+                <a:latin typeface="微軟正黑體" pitchFamily="34" charset="-120"/>
+                <a:ea typeface="微軟正黑體" pitchFamily="34" charset="-120"/>
+              </a:rPr>
+              <a:t>我要永永遠遠渴慕</a:t>
+            </a:r>
+            <a:r>
+              <a:rPr lang="zh-CN" altLang="en-US" sz="4800" b="1" dirty="0">
+                <a:solidFill>
+                  <a:srgbClr val="660033"/>
+                </a:solidFill>
+                <a:latin typeface="微軟正黑體" pitchFamily="34" charset="-120"/>
+                <a:ea typeface="微軟正黑體" pitchFamily="34" charset="-120"/>
+              </a:rPr>
+              <a:t>祢</a:t>
+            </a:r>
+            <a:endParaRPr lang="en-US" altLang="zh-TW" sz="4800" b="1" dirty="0">
+              <a:solidFill>
+                <a:srgbClr val="660033"/>
+              </a:solidFill>
+              <a:latin typeface="微軟正黑體" pitchFamily="34" charset="-120"/>
+              <a:ea typeface="微軟正黑體" pitchFamily="34" charset="-120"/>
+            </a:endParaRPr>
+          </a:p>
+        </p:txBody>
+      </p:sp>
+      <p:sp>
+        <p:nvSpPr>
+          <p:cNvPr id="3" name="TextBox 2">
+            <a:extLst>
+              <a:ext uri="{FF2B5EF4-FFF2-40B4-BE49-F238E27FC236}">
+                <a16:creationId xmlns:a16="http://schemas.microsoft.com/office/drawing/2014/main" id="{0153C8BB-47BE-B237-F012-1010C487943D}"/>
+              </a:ext>
+            </a:extLst>
+          </p:cNvPr>
+          <p:cNvSpPr txBox="1"/>
+          <p:nvPr/>
+        </p:nvSpPr>
+        <p:spPr>
+          <a:xfrm>
+            <a:off x="0" y="3867894"/>
+            <a:ext cx="9144000" cy="461665"/>
+          </a:xfrm>
+          <a:prstGeom prst="rect">
+            <a:avLst/>
+          </a:prstGeom>
+          <a:noFill/>
+        </p:spPr>
+        <p:txBody>
+          <a:bodyPr wrap="square" rtlCol="0">
+            <a:spAutoFit/>
+          </a:bodyPr>
+          <a:lstStyle/>
+          <a:p>
+            <a:pPr algn="ctr"/>
+            <a:r>
+              <a:rPr lang="en-US" sz="2400" b="1" dirty="0">
+                <a:solidFill>
+                  <a:srgbClr val="660033"/>
+                </a:solidFill>
+                <a:latin typeface="Microsoft JhengHei" panose="020B0604030504040204" pitchFamily="34" charset="-120"/>
+                <a:ea typeface="Microsoft JhengHei" panose="020B0604030504040204" pitchFamily="34" charset="-120"/>
+              </a:rPr>
+              <a:t>( </a:t>
+            </a:r>
+            <a:r>
+              <a:rPr lang="zh-CN" altLang="en-US" sz="2400" b="1" dirty="0">
+                <a:solidFill>
+                  <a:srgbClr val="660033"/>
+                </a:solidFill>
+                <a:latin typeface="Microsoft JhengHei" panose="020B0604030504040204" pitchFamily="34" charset="-120"/>
+                <a:ea typeface="Microsoft JhengHei" panose="020B0604030504040204" pitchFamily="34" charset="-120"/>
+              </a:rPr>
+              <a:t>副歌</a:t>
+            </a:r>
+            <a:r>
+              <a:rPr lang="en-US" sz="2400" b="1" dirty="0">
+                <a:solidFill>
+                  <a:srgbClr val="660033"/>
+                </a:solidFill>
+                <a:latin typeface="Microsoft JhengHei" panose="020B0604030504040204" pitchFamily="34" charset="-120"/>
+                <a:ea typeface="Microsoft JhengHei" panose="020B0604030504040204" pitchFamily="34" charset="-120"/>
+              </a:rPr>
+              <a:t> )</a:t>
+            </a:r>
+            <a:endParaRPr lang="vi-VN" sz="2400" b="1" dirty="0">
+              <a:solidFill>
+                <a:srgbClr val="660033"/>
+              </a:solidFill>
+              <a:ea typeface="Microsoft JhengHei" panose="020B0604030504040204" pitchFamily="34" charset="-120"/>
+            </a:endParaRPr>
+          </a:p>
+        </p:txBody>
+      </p:sp>
+    </p:spTree>
+    <p:extLst>
+      <p:ext uri="{BB962C8B-B14F-4D97-AF65-F5344CB8AC3E}">
+        <p14:creationId xmlns:p14="http://schemas.microsoft.com/office/powerpoint/2010/main" val="917551610"/>
+      </p:ext>
+    </p:extLst>
+  </p:cSld>
+  <p:clrMapOvr>
+    <a:masterClrMapping/>
+  </p:clrMapOvr>
+</p:sld>
+</file>
+
+<file path=ppt/slides/slide7.xml><?xml version="1.0" encoding="utf-8"?>
+<p:sld xmlns:a="http://schemas.openxmlformats.org/drawingml/2006/main" xmlns:r="http://schemas.openxmlformats.org/officeDocument/2006/relationships" xmlns:p="http://schemas.openxmlformats.org/presentationml/2006/main">
+  <p:cSld>
+    <p:spTree>
+      <p:nvGrpSpPr>
+        <p:cNvPr id="1" name="">
+          <a:extLst>
+            <a:ext uri="{FF2B5EF4-FFF2-40B4-BE49-F238E27FC236}">
+              <a16:creationId xmlns:a16="http://schemas.microsoft.com/office/drawing/2014/main" id="{3493BD9B-8837-FFB8-F78F-32169CB401F4}"/>
+            </a:ext>
+          </a:extLst>
+        </p:cNvPr>
+        <p:cNvGrpSpPr/>
+        <p:nvPr/>
+      </p:nvGrpSpPr>
+      <p:grpSpPr>
+        <a:xfrm>
+          <a:off x="0" y="0"/>
+          <a:ext cx="0" cy="0"/>
+          <a:chOff x="0" y="0"/>
+          <a:chExt cx="0" cy="0"/>
+        </a:xfrm>
+      </p:grpSpPr>
+      <p:sp>
+        <p:nvSpPr>
+          <p:cNvPr id="5" name="內容版面配置區 4">
+            <a:extLst>
+              <a:ext uri="{FF2B5EF4-FFF2-40B4-BE49-F238E27FC236}">
+                <a16:creationId xmlns:a16="http://schemas.microsoft.com/office/drawing/2014/main" id="{7E6436FA-819D-ADA5-33A2-1C5A763B9E49}"/>
+              </a:ext>
+            </a:extLst>
+          </p:cNvPr>
+          <p:cNvSpPr>
+            <a:spLocks noGrp="1"/>
+          </p:cNvSpPr>
+          <p:nvPr>
+            <p:ph idx="1"/>
+          </p:nvPr>
+        </p:nvSpPr>
+        <p:spPr>
+          <a:xfrm>
+            <a:off x="0" y="1563638"/>
+            <a:ext cx="9144000" cy="1803647"/>
+          </a:xfrm>
+        </p:spPr>
+        <p:txBody>
+          <a:bodyPr anchor="ctr">
+            <a:normAutofit/>
+          </a:bodyPr>
+          <a:lstStyle/>
+          <a:p>
+            <a:pPr algn="ctr">
+              <a:buNone/>
+            </a:pPr>
+            <a:r>
+              <a:rPr lang="zh-CN" altLang="en-US" sz="4800" b="1" dirty="0">
+                <a:solidFill>
+                  <a:srgbClr val="660033"/>
+                </a:solidFill>
+                <a:latin typeface="微軟正黑體" pitchFamily="34" charset="-120"/>
+                <a:ea typeface="微軟正黑體" pitchFamily="34" charset="-120"/>
+              </a:rPr>
+              <a:t>祢</a:t>
+            </a:r>
+            <a:r>
+              <a:rPr lang="zh-TW" altLang="en-US" sz="4800" b="1" dirty="0">
+                <a:solidFill>
+                  <a:srgbClr val="660033"/>
+                </a:solidFill>
+                <a:latin typeface="微軟正黑體" pitchFamily="34" charset="-120"/>
+                <a:ea typeface="微軟正黑體" pitchFamily="34" charset="-120"/>
+              </a:rPr>
+              <a:t>是我一切</a:t>
+            </a:r>
+            <a:r>
+              <a:rPr lang="en-US" altLang="zh-TW" sz="4800" b="1" dirty="0">
+                <a:solidFill>
+                  <a:srgbClr val="660033"/>
+                </a:solidFill>
+                <a:latin typeface="微軟正黑體" pitchFamily="34" charset="-120"/>
+                <a:ea typeface="微軟正黑體" pitchFamily="34" charset="-120"/>
+              </a:rPr>
+              <a:t>  </a:t>
+            </a:r>
+            <a:r>
+              <a:rPr lang="zh-TW" altLang="en-US" sz="4800" b="1" dirty="0">
+                <a:solidFill>
+                  <a:srgbClr val="660033"/>
+                </a:solidFill>
+                <a:latin typeface="微軟正黑體" pitchFamily="34" charset="-120"/>
+                <a:ea typeface="微軟正黑體" pitchFamily="34" charset="-120"/>
+              </a:rPr>
+              <a:t>我心不住思念</a:t>
+            </a:r>
+            <a:r>
+              <a:rPr lang="zh-CN" altLang="en-US" sz="4800" b="1" dirty="0">
+                <a:solidFill>
+                  <a:srgbClr val="660033"/>
+                </a:solidFill>
+                <a:latin typeface="微軟正黑體" pitchFamily="34" charset="-120"/>
+                <a:ea typeface="微軟正黑體" pitchFamily="34" charset="-120"/>
+              </a:rPr>
+              <a:t>祢</a:t>
+            </a:r>
+            <a:endParaRPr lang="en-US" altLang="zh-TW" sz="4800" b="1" dirty="0">
+              <a:solidFill>
+                <a:srgbClr val="660033"/>
+              </a:solidFill>
+              <a:latin typeface="微軟正黑體" pitchFamily="34" charset="-120"/>
+              <a:ea typeface="微軟正黑體" pitchFamily="34" charset="-120"/>
+            </a:endParaRPr>
+          </a:p>
+          <a:p>
+            <a:pPr algn="ctr">
+              <a:buNone/>
+            </a:pPr>
+            <a:r>
+              <a:rPr lang="zh-TW" altLang="en-US" sz="4800" b="1" dirty="0">
+                <a:solidFill>
+                  <a:srgbClr val="660033"/>
+                </a:solidFill>
+                <a:latin typeface="微軟正黑體" pitchFamily="34" charset="-120"/>
+                <a:ea typeface="微軟正黑體" pitchFamily="34" charset="-120"/>
+              </a:rPr>
+              <a:t>只願與</a:t>
+            </a:r>
+            <a:r>
+              <a:rPr lang="zh-CN" altLang="en-US" sz="4800" b="1" dirty="0">
+                <a:solidFill>
+                  <a:srgbClr val="660033"/>
+                </a:solidFill>
+                <a:latin typeface="微軟正黑體" pitchFamily="34" charset="-120"/>
+                <a:ea typeface="微軟正黑體" pitchFamily="34" charset="-120"/>
+              </a:rPr>
+              <a:t>祢</a:t>
+            </a:r>
+            <a:r>
+              <a:rPr lang="zh-TW" altLang="en-US" sz="4800" b="1" dirty="0">
+                <a:solidFill>
+                  <a:srgbClr val="660033"/>
+                </a:solidFill>
+                <a:latin typeface="微軟正黑體" pitchFamily="34" charset="-120"/>
+                <a:ea typeface="微軟正黑體" pitchFamily="34" charset="-120"/>
+              </a:rPr>
+              <a:t>面對面</a:t>
+            </a:r>
+          </a:p>
+        </p:txBody>
+      </p:sp>
+      <p:sp>
+        <p:nvSpPr>
+          <p:cNvPr id="3" name="TextBox 2">
+            <a:extLst>
+              <a:ext uri="{FF2B5EF4-FFF2-40B4-BE49-F238E27FC236}">
+                <a16:creationId xmlns:a16="http://schemas.microsoft.com/office/drawing/2014/main" id="{0D3AFE9F-00AA-83E6-56D5-94D3E7E25516}"/>
+              </a:ext>
+            </a:extLst>
+          </p:cNvPr>
+          <p:cNvSpPr txBox="1"/>
+          <p:nvPr/>
+        </p:nvSpPr>
+        <p:spPr>
+          <a:xfrm>
+            <a:off x="0" y="3867894"/>
+            <a:ext cx="9144000" cy="461665"/>
+          </a:xfrm>
+          <a:prstGeom prst="rect">
+            <a:avLst/>
+          </a:prstGeom>
+          <a:noFill/>
+        </p:spPr>
+        <p:txBody>
+          <a:bodyPr wrap="square" rtlCol="0">
+            <a:spAutoFit/>
+          </a:bodyPr>
+          <a:lstStyle/>
+          <a:p>
+            <a:pPr algn="ctr"/>
+            <a:r>
+              <a:rPr lang="en-US" sz="2400" b="1" dirty="0">
+                <a:solidFill>
+                  <a:srgbClr val="660033"/>
+                </a:solidFill>
+                <a:latin typeface="Microsoft JhengHei" panose="020B0604030504040204" pitchFamily="34" charset="-120"/>
+                <a:ea typeface="Microsoft JhengHei" panose="020B0604030504040204" pitchFamily="34" charset="-120"/>
+              </a:rPr>
+              <a:t>( </a:t>
+            </a:r>
+            <a:r>
+              <a:rPr lang="zh-CN" altLang="en-US" sz="2400" b="1" dirty="0">
+                <a:solidFill>
+                  <a:srgbClr val="660033"/>
+                </a:solidFill>
+                <a:latin typeface="Microsoft JhengHei" panose="020B0604030504040204" pitchFamily="34" charset="-120"/>
+                <a:ea typeface="Microsoft JhengHei" panose="020B0604030504040204" pitchFamily="34" charset="-120"/>
+              </a:rPr>
+              <a:t>副歌</a:t>
+            </a:r>
+            <a:r>
+              <a:rPr lang="en-US" sz="2400" b="1" dirty="0">
+                <a:solidFill>
+                  <a:srgbClr val="660033"/>
+                </a:solidFill>
+                <a:latin typeface="Microsoft JhengHei" panose="020B0604030504040204" pitchFamily="34" charset="-120"/>
+                <a:ea typeface="Microsoft JhengHei" panose="020B0604030504040204" pitchFamily="34" charset="-120"/>
+              </a:rPr>
+              <a:t> )</a:t>
+            </a:r>
+            <a:endParaRPr lang="vi-VN" sz="2400" b="1" dirty="0">
+              <a:solidFill>
+                <a:srgbClr val="660033"/>
+              </a:solidFill>
+              <a:ea typeface="Microsoft JhengHei" panose="020B0604030504040204" pitchFamily="34" charset="-120"/>
+            </a:endParaRPr>
+          </a:p>
+        </p:txBody>
+      </p:sp>
+    </p:spTree>
+    <p:extLst>
+      <p:ext uri="{BB962C8B-B14F-4D97-AF65-F5344CB8AC3E}">
+        <p14:creationId xmlns:p14="http://schemas.microsoft.com/office/powerpoint/2010/main" val="4208357295"/>
+      </p:ext>
+    </p:extLst>
+  </p:cSld>
+  <p:clrMapOvr>
+    <a:masterClrMapping/>
+  </p:clrMapOvr>
+</p:sld>
+</file>
+
+<file path=ppt/slides/slide8.xml><?xml version="1.0" encoding="utf-8"?>
+<p:sld xmlns:a="http://schemas.openxmlformats.org/drawingml/2006/main" xmlns:r="http://schemas.openxmlformats.org/officeDocument/2006/relationships" xmlns:p="http://schemas.openxmlformats.org/presentationml/2006/main">
+  <p:cSld>
+    <p:spTree>
+      <p:nvGrpSpPr>
+        <p:cNvPr id="1" name="">
+          <a:extLst>
+            <a:ext uri="{FF2B5EF4-FFF2-40B4-BE49-F238E27FC236}">
+              <a16:creationId xmlns:a16="http://schemas.microsoft.com/office/drawing/2014/main" id="{56F1DFE2-B4E6-3686-0E54-A20BEB6C67AE}"/>
+            </a:ext>
+          </a:extLst>
+        </p:cNvPr>
+        <p:cNvGrpSpPr/>
+        <p:nvPr/>
+      </p:nvGrpSpPr>
+      <p:grpSpPr>
+        <a:xfrm>
+          <a:off x="0" y="0"/>
+          <a:ext cx="0" cy="0"/>
+          <a:chOff x="0" y="0"/>
+          <a:chExt cx="0" cy="0"/>
+        </a:xfrm>
+      </p:grpSpPr>
+      <p:sp>
+        <p:nvSpPr>
+          <p:cNvPr id="5" name="內容版面配置區 4">
+            <a:extLst>
+              <a:ext uri="{FF2B5EF4-FFF2-40B4-BE49-F238E27FC236}">
+                <a16:creationId xmlns:a16="http://schemas.microsoft.com/office/drawing/2014/main" id="{87CA2B96-EAD3-73A2-F30C-437FDC386007}"/>
+              </a:ext>
+            </a:extLst>
+          </p:cNvPr>
+          <p:cNvSpPr>
+            <a:spLocks noGrp="1"/>
+          </p:cNvSpPr>
+          <p:nvPr>
+            <p:ph idx="1"/>
+          </p:nvPr>
+        </p:nvSpPr>
+        <p:spPr>
+          <a:xfrm>
+            <a:off x="0" y="1563638"/>
+            <a:ext cx="9144000" cy="1803647"/>
+          </a:xfrm>
+        </p:spPr>
+        <p:txBody>
+          <a:bodyPr anchor="ctr">
+            <a:normAutofit/>
+          </a:bodyPr>
+          <a:lstStyle/>
+          <a:p>
+            <a:pPr algn="ctr">
+              <a:buNone/>
+            </a:pPr>
+            <a:r>
+              <a:rPr lang="zh-CN" altLang="en-US" sz="4800" b="1" dirty="0">
+                <a:solidFill>
+                  <a:srgbClr val="660033"/>
+                </a:solidFill>
+                <a:latin typeface="微軟正黑體" pitchFamily="34" charset="-120"/>
+                <a:ea typeface="微軟正黑體" pitchFamily="34" charset="-120"/>
+              </a:rPr>
+              <a:t>祢</a:t>
+            </a:r>
+            <a:r>
+              <a:rPr lang="zh-TW" altLang="en-US" sz="4800" b="1" dirty="0">
+                <a:solidFill>
+                  <a:srgbClr val="660033"/>
+                </a:solidFill>
+                <a:latin typeface="微軟正黑體" pitchFamily="34" charset="-120"/>
+                <a:ea typeface="微軟正黑體" pitchFamily="34" charset="-120"/>
+              </a:rPr>
+              <a:t>的愛最美  我心不住思念</a:t>
+            </a:r>
+            <a:r>
+              <a:rPr lang="zh-CN" altLang="en-US" sz="4800" b="1" dirty="0">
+                <a:solidFill>
+                  <a:srgbClr val="660033"/>
+                </a:solidFill>
+                <a:latin typeface="微軟正黑體" pitchFamily="34" charset="-120"/>
+                <a:ea typeface="微軟正黑體" pitchFamily="34" charset="-120"/>
+              </a:rPr>
+              <a:t>祢</a:t>
+            </a:r>
+            <a:endParaRPr lang="en-US" altLang="zh-TW" sz="4800" b="1" dirty="0">
+              <a:solidFill>
+                <a:srgbClr val="660033"/>
+              </a:solidFill>
+              <a:latin typeface="微軟正黑體" pitchFamily="34" charset="-120"/>
+              <a:ea typeface="微軟正黑體" pitchFamily="34" charset="-120"/>
+            </a:endParaRPr>
+          </a:p>
+          <a:p>
+            <a:pPr algn="ctr">
+              <a:buNone/>
+            </a:pPr>
+            <a:r>
+              <a:rPr lang="zh-TW" altLang="en-US" sz="4800" b="1" dirty="0">
+                <a:solidFill>
+                  <a:srgbClr val="660033"/>
+                </a:solidFill>
+                <a:latin typeface="微軟正黑體" pitchFamily="34" charset="-120"/>
+                <a:ea typeface="微軟正黑體" pitchFamily="34" charset="-120"/>
+              </a:rPr>
+              <a:t>只願與</a:t>
+            </a:r>
+            <a:r>
+              <a:rPr lang="zh-CN" altLang="en-US" sz="4800" b="1" dirty="0">
+                <a:solidFill>
+                  <a:srgbClr val="660033"/>
+                </a:solidFill>
+                <a:latin typeface="微軟正黑體" pitchFamily="34" charset="-120"/>
+                <a:ea typeface="微軟正黑體" pitchFamily="34" charset="-120"/>
+              </a:rPr>
+              <a:t>祢</a:t>
+            </a:r>
+            <a:r>
+              <a:rPr lang="zh-TW" altLang="en-US" sz="4800" b="1" dirty="0">
+                <a:solidFill>
+                  <a:srgbClr val="660033"/>
+                </a:solidFill>
+                <a:latin typeface="微軟正黑體" pitchFamily="34" charset="-120"/>
+                <a:ea typeface="微軟正黑體" pitchFamily="34" charset="-120"/>
+              </a:rPr>
+              <a:t>面對面</a:t>
+            </a:r>
+          </a:p>
+        </p:txBody>
+      </p:sp>
+      <p:sp>
+        <p:nvSpPr>
+          <p:cNvPr id="3" name="TextBox 2">
+            <a:extLst>
+              <a:ext uri="{FF2B5EF4-FFF2-40B4-BE49-F238E27FC236}">
+                <a16:creationId xmlns:a16="http://schemas.microsoft.com/office/drawing/2014/main" id="{8D87B62B-8A8B-045C-4875-6FFA7A981C84}"/>
+              </a:ext>
+            </a:extLst>
+          </p:cNvPr>
+          <p:cNvSpPr txBox="1"/>
+          <p:nvPr/>
+        </p:nvSpPr>
+        <p:spPr>
+          <a:xfrm>
+            <a:off x="0" y="3867894"/>
+            <a:ext cx="9144000" cy="461665"/>
+          </a:xfrm>
+          <a:prstGeom prst="rect">
+            <a:avLst/>
+          </a:prstGeom>
+          <a:noFill/>
+        </p:spPr>
+        <p:txBody>
+          <a:bodyPr wrap="square" rtlCol="0">
+            <a:spAutoFit/>
+          </a:bodyPr>
+          <a:lstStyle/>
+          <a:p>
+            <a:pPr algn="ctr"/>
+            <a:r>
+              <a:rPr lang="en-US" sz="2400" b="1" dirty="0">
+                <a:solidFill>
+                  <a:srgbClr val="660033"/>
+                </a:solidFill>
+                <a:latin typeface="Microsoft JhengHei" panose="020B0604030504040204" pitchFamily="34" charset="-120"/>
+                <a:ea typeface="Microsoft JhengHei" panose="020B0604030504040204" pitchFamily="34" charset="-120"/>
+              </a:rPr>
+              <a:t>( </a:t>
+            </a:r>
+            <a:r>
+              <a:rPr lang="zh-CN" altLang="en-US" sz="2400" b="1" dirty="0">
+                <a:solidFill>
+                  <a:srgbClr val="660033"/>
+                </a:solidFill>
+                <a:latin typeface="Microsoft JhengHei" panose="020B0604030504040204" pitchFamily="34" charset="-120"/>
+                <a:ea typeface="Microsoft JhengHei" panose="020B0604030504040204" pitchFamily="34" charset="-120"/>
+              </a:rPr>
+              <a:t>結尾</a:t>
+            </a:r>
+            <a:r>
+              <a:rPr lang="en-US" sz="2400" b="1" dirty="0">
+                <a:solidFill>
+                  <a:srgbClr val="660033"/>
+                </a:solidFill>
+                <a:latin typeface="Microsoft JhengHei" panose="020B0604030504040204" pitchFamily="34" charset="-120"/>
+                <a:ea typeface="Microsoft JhengHei" panose="020B0604030504040204" pitchFamily="34" charset="-120"/>
+              </a:rPr>
+              <a:t> )</a:t>
+            </a:r>
+            <a:endParaRPr lang="vi-VN" sz="2400" b="1" dirty="0">
+              <a:solidFill>
+                <a:srgbClr val="660033"/>
+              </a:solidFill>
+              <a:ea typeface="Microsoft JhengHei" panose="020B0604030504040204" pitchFamily="34" charset="-120"/>
+            </a:endParaRPr>
+          </a:p>
+        </p:txBody>
+      </p:sp>
+    </p:spTree>
+    <p:extLst>
+      <p:ext uri="{BB962C8B-B14F-4D97-AF65-F5344CB8AC3E}">
+        <p14:creationId xmlns:p14="http://schemas.microsoft.com/office/powerpoint/2010/main" val="2276702923"/>
+      </p:ext>
+    </p:extLst>
   </p:cSld>
   <p:clrMapOvr>
     <a:masterClrMapping/>
